--- a/generated_ppts/Integration and Synthesis in AI.pptx
+++ b/generated_ppts/Integration and Synthesis in AI.pptx
@@ -40,6 +40,22 @@
     <p:sldId id="288" r:id="rId39"/>
     <p:sldId id="289" r:id="rId40"/>
     <p:sldId id="290" r:id="rId41"/>
+    <p:sldId id="291" r:id="rId42"/>
+    <p:sldId id="292" r:id="rId43"/>
+    <p:sldId id="293" r:id="rId44"/>
+    <p:sldId id="294" r:id="rId45"/>
+    <p:sldId id="295" r:id="rId46"/>
+    <p:sldId id="296" r:id="rId47"/>
+    <p:sldId id="297" r:id="rId48"/>
+    <p:sldId id="298" r:id="rId49"/>
+    <p:sldId id="299" r:id="rId50"/>
+    <p:sldId id="300" r:id="rId51"/>
+    <p:sldId id="301" r:id="rId52"/>
+    <p:sldId id="302" r:id="rId53"/>
+    <p:sldId id="303" r:id="rId54"/>
+    <p:sldId id="304" r:id="rId55"/>
+    <p:sldId id="305" r:id="rId56"/>
+    <p:sldId id="306" r:id="rId57"/>
   </p:sldIdLst>
   <p:sldSz cx="9144000" cy="6858000" type="screen4x3"/>
   <p:notesSz cx="6858000" cy="9144000"/>
@@ -3159,27 +3175,27 @@
           <a:lstStyle/>
           <a:p>
             <a:r>
-              <a:t>Welcome to 'Integration and Synthesis in AI', a unit exploring the multifaceted landscape of artificial intelligence.</a:t>
-            </a:r>
-          </a:p>
-          <a:p>
-            <a:r>
-              <a:t>This course bridges theoretical AI concepts with practical applications, emphasizing their interconnections and societal impact.</a:t>
-            </a:r>
-          </a:p>
-          <a:p>
-            <a:r>
-              <a:t>We will analyze how various AI domains, such as natural language processing and machine learning, converge to create complex intelligent systems.</a:t>
-            </a:r>
-          </a:p>
-          <a:p>
-            <a:r>
-              <a:t>A core focus will be on the critical evaluation of AI's ethical, social, and technical challenges, promoting responsible innovation.</a:t>
-            </a:r>
-          </a:p>
-          <a:p>
-            <a:r>
-              <a:t>Through a series of key topics, we aim to develop a holistic understanding of AI's present capabilities and future trajectory.</a:t>
+              <a:t>Welcome to a comprehensive unit exploring the fundamental principles and advanced applications of Artificial Intelligence.</a:t>
+            </a:r>
+          </a:p>
+          <a:p>
+            <a:r>
+              <a:t>This unit emphasizes the integration of various AI sub-fields, particularly Natural Language Processing (NLP), with broader ethical and societal considerations.</a:t>
+            </a:r>
+          </a:p>
+          <a:p>
+            <a:r>
+              <a:t>We will synthesize theoretical knowledge with practical implications, preparing students for responsible and innovative AI development.</a:t>
+            </a:r>
+          </a:p>
+          <a:p>
+            <a:r>
+              <a:t>Key themes include algorithmic fairness, data privacy, model interpretability, and the future trajectory of AI technologies.</a:t>
+            </a:r>
+          </a:p>
+          <a:p>
+            <a:r>
+              <a:t>The curriculum is designed to foster critical thinking about the complex interplay between AI capabilities and human values.</a:t>
             </a:r>
           </a:p>
         </p:txBody>
@@ -3218,7 +3234,7 @@
           <a:lstStyle/>
           <a:p>
             <a:r>
-              <a:t>Chatbots and Language Models: Ethical Considerations and Future Directions</a:t>
+              <a:t>Text Preprocessing: Advanced Techniques</a:t>
             </a:r>
           </a:p>
         </p:txBody>
@@ -3239,32 +3255,27 @@
           <a:lstStyle/>
           <a:p>
             <a:r>
-              <a:t>Addressing algorithmic bias is paramount, requiring careful data curation, fairness metrics, and bias detection/mitigation strategies during development and deployment.</a:t>
-            </a:r>
-          </a:p>
-          <a:p>
-            <a:r>
-              <a:t>Ensuring transparency and interpretability helps users understand how chatbots arrive at their responses, fostering trust and accountability.</a:t>
-            </a:r>
-          </a:p>
-          <a:p>
-            <a:r>
-              <a:t>The need for robust safety mechanisms to prevent the generation of harmful, hateful, or misleading content is a critical ongoing research area.</a:t>
-            </a:r>
-          </a:p>
-          <a:p>
-            <a:r>
-              <a:t>Privacy concerns arise from the handling of user data during interactions, necessitating strong data protection and anonymization protocols.</a:t>
-            </a:r>
-          </a:p>
-          <a:p>
-            <a:r>
-              <a:t>Future directions involve developing more truly multilingual and culturally aware models, reducing current biases towards dominant languages and cultures.</a:t>
-            </a:r>
-          </a:p>
-          <a:p>
-            <a:r>
-              <a:t>Research into achieving genuine reasoning capabilities, integrating with external knowledge bases, and advancing towards Artificial General Intelligence (AGI) continues.</a:t>
+              <a:t>Noise reduction can involve removing HTML tags, URLs, or other non-textual elements that are artifacts of data collection.</a:t>
+            </a:r>
+          </a:p>
+          <a:p>
+            <a:r>
+              <a:t>Character normalization addresses variations in character representation, such as converting different hyphen types or unicode variations to a standard form.</a:t>
+            </a:r>
+          </a:p>
+          <a:p>
+            <a:r>
+              <a:t>Handling encoding issues ensures consistent interpretation of characters, preventing 'mojibake' or corrupted text during processing.</a:t>
+            </a:r>
+          </a:p>
+          <a:p>
+            <a:r>
+              <a:t>Tokenization (covered separately) is often considered a preprocessing step, breaking text into meaningful units.</a:t>
+            </a:r>
+          </a:p>
+          <a:p>
+            <a:r>
+              <a:t>Spell correction and grammatical error detection can be applied to noisy data (e.g., social media text) to improve quality, though it's computationally intensive.</a:t>
             </a:r>
           </a:p>
         </p:txBody>
@@ -3303,7 +3314,7 @@
           <a:lstStyle/>
           <a:p>
             <a:r>
-              <a:t>Ethical Issues in AI: Foundations and Frameworks</a:t>
+              <a:t>Text Preprocessing: Impact on Model Performance</a:t>
             </a:r>
           </a:p>
         </p:txBody>
@@ -3324,32 +3335,27 @@
           <a:lstStyle/>
           <a:p>
             <a:r>
-              <a:t>AI ethics is a field that examines the moral implications of developing, deploying, and using artificial intelligence systems.</a:t>
-            </a:r>
-          </a:p>
-          <a:p>
-            <a:r>
-              <a:t>It addresses questions of responsibility, accountability, fairness, transparency, and autonomy in the context of intelligent machines.</a:t>
-            </a:r>
-          </a:p>
-          <a:p>
-            <a:r>
-              <a:t>Key ethical principles often cited include beneficence (do good), non-maleficence (do no harm), autonomy (respect user agency), and justice (fairness and equity).</a:t>
-            </a:r>
-          </a:p>
-          <a:p>
-            <a:r>
-              <a:t>Several organizations, such as the EU High-Level Expert Group on AI, OECD, and IEEE, have proposed ethical guidelines and frameworks for responsible AI development.</a:t>
-            </a:r>
-          </a:p>
-          <a:p>
-            <a:r>
-              <a:t>These frameworks typically advocate for human oversight, technical robustness and safety, privacy and data governance, transparency, diversity, non-discrimination, and accountability.</a:t>
-            </a:r>
-          </a:p>
-          <a:p>
-            <a:r>
-              <a:t>The 'value alignment problem' refers to the challenge of ensuring that AI systems act in accordance with human values and objectives, especially as AI becomes more autonomous.</a:t>
+              <a:t>The choice of preprocessing steps directly influences the vocabulary size, feature representation, and ultimately the performance of NLP models.</a:t>
+            </a:r>
+          </a:p>
+          <a:p>
+            <a:r>
+              <a:t>Aggressive preprocessing can lead to information loss, making it harder for models to capture subtle semantic distinctions.</a:t>
+            </a:r>
+          </a:p>
+          <a:p>
+            <a:r>
+              <a:t>Insufficient preprocessing, conversely, can introduce noise and increase model complexity, leading to overfitting or poor generalization.</a:t>
+            </a:r>
+          </a:p>
+          <a:p>
+            <a:r>
+              <a:t>For tasks like sentiment analysis, retaining punctuation or even stop words might be crucial for understanding nuances and negation.</a:t>
+            </a:r>
+          </a:p>
+          <a:p>
+            <a:r>
+              <a:t>Experimentation with different preprocessing pipelines is often necessary to optimize results for a specific NLP task and dataset.</a:t>
             </a:r>
           </a:p>
         </p:txBody>
@@ -3388,7 +3394,7 @@
           <a:lstStyle/>
           <a:p>
             <a:r>
-              <a:t>Ethical Issues in AI: Key Dilemmas and Concerns</a:t>
+              <a:t>Tokenization: Breaking Down Text</a:t>
             </a:r>
           </a:p>
         </p:txBody>
@@ -3409,32 +3415,27 @@
           <a:lstStyle/>
           <a:p>
             <a:r>
-              <a:t>**Bias and Discrimination:** AI systems can perpetuate or amplify societal biases present in their training data, leading to unfair outcomes in areas like hiring, lending, or criminal justice.</a:t>
-            </a:r>
-          </a:p>
-          <a:p>
-            <a:r>
-              <a:t>**Accountability and Responsibility:** Determining who is responsible when an autonomous AI system causes harm is complex, involving developers, deployers, and users.</a:t>
-            </a:r>
-          </a:p>
-          <a:p>
-            <a:r>
-              <a:t>**Privacy and Surveillance:** AI's ability to process vast amounts of personal data raises concerns about surveillance, data misuse, and erosion of individual privacy.</a:t>
-            </a:r>
-          </a:p>
-          <a:p>
-            <a:r>
-              <a:t>**Autonomy and Control:** As AI systems become more capable and autonomous, questions arise about human control over these systems and potential loss of human agency.</a:t>
-            </a:r>
-          </a:p>
-          <a:p>
-            <a:r>
-              <a:t>**Job Displacement:** The automation driven by AI could lead to significant workforce disruptions, raising ethical concerns about economic inequality and societal stability.</a:t>
-            </a:r>
-          </a:p>
-          <a:p>
-            <a:r>
-              <a:t>**Misinformation and Manipulation:** AI-powered tools (e.g., deepfakes, persuasive AI) can be used to generate and spread misinformation, potentially influencing public opinion and undermining trust.</a:t>
+              <a:t>Tokenization is the process of splitting text into smaller units called tokens, which can be words, subwords, characters, or even sentences.</a:t>
+            </a:r>
+          </a:p>
+          <a:p>
+            <a:r>
+              <a:t>It forms the basic input units for most NLP models, enabling them to process and understand the textual data effectively.</a:t>
+            </a:r>
+          </a:p>
+          <a:p>
+            <a:r>
+              <a:t>The choice of tokenization strategy significantly impacts the vocabulary size, model complexity, and ability to handle out-of-vocabulary (OOV) words.</a:t>
+            </a:r>
+          </a:p>
+          <a:p>
+            <a:r>
+              <a:t>Effective tokenization is crucial for tasks ranging from text classification and information retrieval to machine translation and language generation.</a:t>
+            </a:r>
+          </a:p>
+          <a:p>
+            <a:r>
+              <a:t>Different languages and linguistic phenomena often require specialized tokenization rules to correctly segment text.</a:t>
             </a:r>
           </a:p>
         </p:txBody>
@@ -3473,7 +3474,7 @@
           <a:lstStyle/>
           <a:p>
             <a:r>
-              <a:t>Ethical Issues in AI: Case Studies and Real-world Impact</a:t>
+              <a:t>Tokenization: Word-Level Strategies</a:t>
             </a:r>
           </a:p>
         </p:txBody>
@@ -3494,32 +3495,27 @@
           <a:lstStyle/>
           <a:p>
             <a:r>
-              <a:t>**Facial Recognition:** Used by law enforcement, it raises concerns about privacy, surveillance, and potential for misidentification, particularly among minority groups.</a:t>
-            </a:r>
-          </a:p>
-          <a:p>
-            <a:r>
-              <a:t>**Autonomous Vehicles:** Ethical dilemmas arise in accident scenarios, where an AI system might have to make choices with conflicting moral outcomes (e.g., sacrificing occupants vs. pedestrians).</a:t>
-            </a:r>
-          </a:p>
-          <a:p>
-            <a:r>
-              <a:t>**Hiring Algorithms:** AI tools designed to screen job applicants have been found to exhibit gender or racial biases, leading to discriminatory hiring practices.</a:t>
-            </a:r>
-          </a:p>
-          <a:p>
-            <a:r>
-              <a:t>**Loan Approval Systems:** Predictive algorithms in finance can inadvertently redline certain demographics or neighborhoods based on historical data, perpetuating economic inequality.</a:t>
-            </a:r>
-          </a:p>
-          <a:p>
-            <a:r>
-              <a:t>**Social Media Content Moderation:** AI-powered moderation systems face challenges in accurately identifying harmful content while avoiding censorship, often exhibiting biases or errors.</a:t>
-            </a:r>
-          </a:p>
-          <a:p>
-            <a:r>
-              <a:t>**Healthcare Diagnostics:** While AI can improve diagnostic accuracy, ethical questions arise regarding data privacy, informed consent, and the 'black box' nature of clinical AI decisions.</a:t>
+              <a:t>Whitespace tokenization is the simplest method, splitting text based on spaces, but it struggles with contractions ('don't') and punctuation attached to words ('hello.').</a:t>
+            </a:r>
+          </a:p>
+          <a:p>
+            <a:r>
+              <a:t>Rule-based tokenizers use predefined patterns and exceptions to handle specific linguistic constructions, such as separating punctuation or common suffixes.</a:t>
+            </a:r>
+          </a:p>
+          <a:p>
+            <a:r>
+              <a:t>Regular expressions offer a powerful way to define custom tokenization rules, allowing for flexible and precise segmentation.</a:t>
+            </a:r>
+          </a:p>
+          <a:p>
+            <a:r>
+              <a:t>Challenges include handling hyphenated words (e.g., 'state-of-the-art'), numerical expressions, and language-specific compounds.</a:t>
+            </a:r>
+          </a:p>
+          <a:p>
+            <a:r>
+              <a:t>Word tokenization is typically followed by normalization steps like lowercasing and stemming/lemmatization to reduce variations.</a:t>
             </a:r>
           </a:p>
         </p:txBody>
@@ -3558,7 +3554,7 @@
           <a:lstStyle/>
           <a:p>
             <a:r>
-              <a:t>Ethical Issues in AI: Towards Responsible AI Development</a:t>
+              <a:t>Tokenization: Subword-Level Strategies</a:t>
             </a:r>
           </a:p>
         </p:txBody>
@@ -3579,32 +3575,27 @@
           <a:lstStyle/>
           <a:p>
             <a:r>
-              <a:t>Implementing 'Ethics by Design' and 'Privacy by Design' principles ensures ethical considerations are integrated throughout the entire AI development lifecycle, not as an afterthought.</a:t>
-            </a:r>
-          </a:p>
-          <a:p>
-            <a:r>
-              <a:t>Developing and adopting robust AI governance frameworks within organizations, including ethical review boards and clear lines of accountability.</a:t>
-            </a:r>
-          </a:p>
-          <a:p>
-            <a:r>
-              <a:t>Fostering multidisciplinary collaboration, involving ethicists, legal experts, social scientists, and policymakers alongside AI engineers, to address complex ethical challenges.</a:t>
-            </a:r>
-          </a:p>
-          <a:p>
-            <a:r>
-              <a:t>Promoting AI literacy and education for both developers and the public to ensure a better understanding of AI capabilities, limitations, and ethical implications.</a:t>
-            </a:r>
-          </a:p>
-          <a:p>
-            <a:r>
-              <a:t>Investing in research on Explainable AI (XAI) to increase transparency and interpretability of AI models, crucial for building trust and accountability.</a:t>
-            </a:r>
-          </a:p>
-          <a:p>
-            <a:r>
-              <a:t>Establishing clear regulatory guidelines and standards, potentially through international cooperation, to mitigate risks and ensure fair and safe AI deployment.</a:t>
+              <a:t>Subword tokenization addresses the OOV problem and manages vocabulary size by breaking words into smaller, frequently occurring units.</a:t>
+            </a:r>
+          </a:p>
+          <a:p>
+            <a:r>
+              <a:t>Byte Pair Encoding (BPE) iteratively merges the most frequent pairs of characters or character sequences until a specified vocabulary size is reached.</a:t>
+            </a:r>
+          </a:p>
+          <a:p>
+            <a:r>
+              <a:t>WordPiece, used by models like BERT, is similar to BPE but prioritizes merging pairs that maximize the likelihood of a language model.</a:t>
+            </a:r>
+          </a:p>
+          <a:p>
+            <a:r>
+              <a:t>SentencePiece, often used in Transformer models, treats the input as a raw stream of characters, including whitespace, which helps in consistent handling of different languages.</a:t>
+            </a:r>
+          </a:p>
+          <a:p>
+            <a:r>
+              <a:t>These methods allow models to represent rare words by composing them from known subwords, capturing morphological information more effectively.</a:t>
             </a:r>
           </a:p>
         </p:txBody>
@@ -3643,7 +3634,7 @@
           <a:lstStyle/>
           <a:p>
             <a:r>
-              <a:t>Ethical Issues in AI: Future Outlook and Global Challenges</a:t>
+              <a:t>Tokenization: Character-Level Strategies</a:t>
             </a:r>
           </a:p>
         </p:txBody>
@@ -3664,32 +3655,27 @@
           <a:lstStyle/>
           <a:p>
             <a:r>
-              <a:t>The rise of advanced AI, including potential Artificial General Intelligence (AGI), intensifies ethical questions about sentience, consciousness, and the definition of intelligence.</a:t>
-            </a:r>
-          </a:p>
-          <a:p>
-            <a:r>
-              <a:t>Geopolitical implications of AI are significant, with a global race for AI supremacy raising concerns about autonomous weapons systems and surveillance technologies.</a:t>
-            </a:r>
-          </a:p>
-          <a:p>
-            <a:r>
-              <a:t>The 'digital divide' could widen further if access to advanced AI technologies and their benefits is not equitably distributed globally.</a:t>
-            </a:r>
-          </a:p>
-          <a:p>
-            <a:r>
-              <a:t>International cooperation is crucial for developing shared norms, standards, and treaties regarding AI ethics, safety, and governance.</a:t>
-            </a:r>
-          </a:p>
-          <a:p>
-            <a:r>
-              <a:t>Continuous public discourse and participatory approaches are essential to shape AI's future in a way that reflects diverse societal values and aspirations.</a:t>
-            </a:r>
-          </a:p>
-          <a:p>
-            <a:r>
-              <a:t>Striking a balance between fostering innovation and implementing necessary safeguards will be a continuous challenge for policymakers and the AI community.</a:t>
+              <a:t>Character tokenization treats each character as a token, resulting in a very small vocabulary size and eliminating the OOV problem entirely.</a:t>
+            </a:r>
+          </a:p>
+          <a:p>
+            <a:r>
+              <a:t>It is particularly useful for tasks involving text with many misspellings, noisy data, or languages with complex morphology where word boundaries are ambiguous.</a:t>
+            </a:r>
+          </a:p>
+          <a:p>
+            <a:r>
+              <a:t>Character-level models can be effective for tasks like optical character recognition (OCR), text generation at fine granularity, and some security applications.</a:t>
+            </a:r>
+          </a:p>
+          <a:p>
+            <a:r>
+              <a:t>The main drawback is that it requires deeper neural networks to learn meaningful semantic relationships from individual characters, increasing computational cost.</a:t>
+            </a:r>
+          </a:p>
+          <a:p>
+            <a:r>
+              <a:t>While less common for high-level semantic tasks, it forms the basis for subword tokenization by providing the initial character units.</a:t>
             </a:r>
           </a:p>
         </p:txBody>
@@ -3728,7 +3714,7 @@
           <a:lstStyle/>
           <a:p>
             <a:r>
-              <a:t>Bias and Fairness: Understanding AI Bias</a:t>
+              <a:t>Tokenization: Advanced Issues and Considerations</a:t>
             </a:r>
           </a:p>
         </p:txBody>
@@ -3749,32 +3735,27 @@
           <a:lstStyle/>
           <a:p>
             <a:r>
-              <a:t>AI bias refers to systematic and repeatable errors in an AI system that create unfair outcomes, such as favoring one group over others.</a:t>
-            </a:r>
-          </a:p>
-          <a:p>
-            <a:r>
-              <a:t>Bias can originate from various stages of the AI lifecycle, primarily from biased training data, algorithmic design choices, or flawed evaluation metrics.</a:t>
-            </a:r>
-          </a:p>
-          <a:p>
-            <a:r>
-              <a:t>**Historical Bias (Societal Bias):** Data reflects existing societal prejudices and inequalities, which are then learned and perpetuated by the AI model.</a:t>
-            </a:r>
-          </a:p>
-          <a:p>
-            <a:r>
-              <a:t>**Selection Bias:** Occurs when the data used for training is not representative of the real-world population or distribution it's intended to serve.</a:t>
-            </a:r>
-          </a:p>
-          <a:p>
-            <a:r>
-              <a:t>**Measurement Bias:** Arises from errors in how data is collected, labeled, or measured, leading to inaccurate or incomplete representations.</a:t>
-            </a:r>
-          </a:p>
-          <a:p>
-            <a:r>
-              <a:t>**Algorithmic Bias:** Can be introduced through specific design choices within the algorithm itself, such as feature selection, model architecture, or optimization objectives.</a:t>
+              <a:t>Multi-word expressions (MWEs), such as 'New York' or 'kick the bucket', are challenging as they function as single semantic units but are often tokenized as separate words.</a:t>
+            </a:r>
+          </a:p>
+          <a:p>
+            <a:r>
+              <a:t>Sentence boundary detection is a critical preprocessing step for many NLP tasks, identifying where one sentence ends and another begins, often complex due to abbreviations or varied punctuation.</a:t>
+            </a:r>
+          </a:p>
+          <a:p>
+            <a:r>
+              <a:t>Language-specific tokenizers are essential for languages without clear word boundaries (e.g., Chinese, Japanese) or with rich morphology (e.g., agglutinative languages).</a:t>
+            </a:r>
+          </a:p>
+          <a:p>
+            <a:r>
+              <a:t>The choice of tokenizer impacts the size and quality of embeddings, directly influencing model performance and generalizability.</a:t>
+            </a:r>
+          </a:p>
+          <a:p>
+            <a:r>
+              <a:t>Modern deep learning models often integrate tokenization directly into the architecture, leveraging pre-trained subword tokenizers for efficiency and robustness.</a:t>
             </a:r>
           </a:p>
         </p:txBody>
@@ -3813,7 +3794,7 @@
           <a:lstStyle/>
           <a:p>
             <a:r>
-              <a:t>Bias and Fairness: Manifestations and Impact</a:t>
+              <a:t>Sentiment Analysis: Understanding Emotions</a:t>
             </a:r>
           </a:p>
         </p:txBody>
@@ -3834,32 +3815,27 @@
           <a:lstStyle/>
           <a:p>
             <a:r>
-              <a:t>**Gender Bias:** AI systems can exhibit gender stereotypes, for example, associating specific professions with one gender, leading to discriminatory hiring recommendations.</a:t>
-            </a:r>
-          </a:p>
-          <a:p>
-            <a:r>
-              <a:t>**Racial Bias:** Facial recognition systems have shown higher error rates for individuals with darker skin tones, leading to misidentification and disproportionate surveillance.</a:t>
-            </a:r>
-          </a:p>
-          <a:p>
-            <a:r>
-              <a:t>**Socioeconomic Bias:** Loan approval algorithms might unfairly deny credit to individuals from certain socioeconomic backgrounds based on irrelevant proxies in the data.</a:t>
-            </a:r>
-          </a:p>
-          <a:p>
-            <a:r>
-              <a:t>**Healthcare Disparities:** AI diagnostic tools trained on data from predominantly certain demographics may perform poorly or inaccurately for underrepresented groups, exacerbating health inequalities.</a:t>
-            </a:r>
-          </a:p>
-          <a:p>
-            <a:r>
-              <a:t>**Justice System Bias:** Predictive policing algorithms or recidivism prediction tools can perpetuate racial disparities in sentencing and surveillance, based on biased historical arrest data.</a:t>
-            </a:r>
-          </a:p>
-          <a:p>
-            <a:r>
-              <a:t>The cumulative impact of these biases is the reinforcement of systemic discrimination, erosion of trust in AI, and significant social and economic harms to marginalized communities.</a:t>
+              <a:t>Sentiment analysis, also known as opinion mining, is the computational study of opinions, sentiments, and emotions expressed in text.</a:t>
+            </a:r>
+          </a:p>
+          <a:p>
+            <a:r>
+              <a:t>Its primary goal is to determine the emotional tone behind a body of text, whether it is positive, negative, or neutral.</a:t>
+            </a:r>
+          </a:p>
+          <a:p>
+            <a:r>
+              <a:t>Applications span diverse fields, including customer feedback analysis, market research, social media monitoring, and political analysis.</a:t>
+            </a:r>
+          </a:p>
+          <a:p>
+            <a:r>
+              <a:t>It helps businesses understand customer perceptions of products/services and gain insights into brand reputation.</a:t>
+            </a:r>
+          </a:p>
+          <a:p>
+            <a:r>
+              <a:t>The task involves classifying text into predefined sentiment categories or assigning a sentiment score along a continuum.</a:t>
             </a:r>
           </a:p>
         </p:txBody>
@@ -3898,7 +3874,7 @@
           <a:lstStyle/>
           <a:p>
             <a:r>
-              <a:t>Bias and Fairness: Defining and Measuring Fairness</a:t>
+              <a:t>Sentiment Analysis: Lexicon-Based Approaches</a:t>
             </a:r>
           </a:p>
         </p:txBody>
@@ -3919,32 +3895,27 @@
           <a:lstStyle/>
           <a:p>
             <a:r>
-              <a:t>Fairness in AI is a complex, multi-faceted concept with no single universally accepted definition, often depending on the specific application and context.</a:t>
-            </a:r>
-          </a:p>
-          <a:p>
-            <a:r>
-              <a:t>**Demographic Parity (Statistical Parity):** Requires that a positive outcome (e.g., loan approval, job offer) is granted at the same rate across different protected groups.</a:t>
-            </a:r>
-          </a:p>
-          <a:p>
-            <a:r>
-              <a:t>**Equalized Odds:** Demands that a model has equal true positive rates and equal false positive rates across different groups, aiming for equal accuracy for everyone.</a:t>
-            </a:r>
-          </a:p>
-          <a:p>
-            <a:r>
-              <a:t>**Equality of Opportunity:** Focuses on achieving equal true positive rates across groups, meaning all qualified individuals have an equal chance of receiving a positive outcome.</a:t>
-            </a:r>
-          </a:p>
-          <a:p>
-            <a:r>
-              <a:t>Other metrics include predictive parity (equal precision), treatment equality (equal false negative and false positive rates), and group unwittingness (outputs are independent of protected attributes).</a:t>
-            </a:r>
-          </a:p>
-          <a:p>
-            <a:r>
-              <a:t>Measuring fairness often involves identifying 'protected attributes' (e.g., race, gender, age) and then analyzing model performance and outcomes across subgroups defined by these attributes.</a:t>
+              <a:t>Lexicon-based methods rely on pre-compiled dictionaries (lexicons) of words annotated with their associated sentiment scores (e.g., positive, negative, polarity strength).</a:t>
+            </a:r>
+          </a:p>
+          <a:p>
+            <a:r>
+              <a:t>Rule-based systems use linguistic rules and patterns, along with lexicons, to identify sentiment-bearing phrases and combine their scores.</a:t>
+            </a:r>
+          </a:p>
+          <a:p>
+            <a:r>
+              <a:t>Dictionary-based approaches sum or average the sentiment scores of words present in a text to determine its overall sentiment.</a:t>
+            </a:r>
+          </a:p>
+          <a:p>
+            <a:r>
+              <a:t>Popular sentiment lexicons include SentiWordNet, VADER (Valence Aware Dictionary and sEntiment Reasoner), and AFINN.</a:t>
+            </a:r>
+          </a:p>
+          <a:p>
+            <a:r>
+              <a:t>While simple and interpretable, lexicon-based methods often struggle with context-dependent sentiment, sarcasm, and negation without complex rule sets.</a:t>
             </a:r>
           </a:p>
         </p:txBody>
@@ -3983,7 +3954,7 @@
           <a:lstStyle/>
           <a:p>
             <a:r>
-              <a:t>Bias and Fairness: Mitigation Strategies</a:t>
+              <a:t>Sentiment Analysis: Machine Learning Approaches</a:t>
             </a:r>
           </a:p>
         </p:txBody>
@@ -4004,32 +3975,27 @@
           <a:lstStyle/>
           <a:p>
             <a:r>
-              <a:t>**Pre-processing Techniques:** Address bias directly in the data by re-sampling, re-weighting, or modifying features to achieve more balanced and representative datasets before model training.</a:t>
-            </a:r>
-          </a:p>
-          <a:p>
-            <a:r>
-              <a:t>**In-processing Techniques:** Integrate fairness constraints directly into the model training algorithm, for example, by adding regularization terms that penalize unfair outcomes.</a:t>
-            </a:r>
-          </a:p>
-          <a:p>
-            <a:r>
-              <a:t>**Post-processing Techniques:** Adjust model predictions after training, such as by applying a different decision threshold for different demographic groups to equalize outcomes.</a:t>
-            </a:r>
-          </a:p>
-          <a:p>
-            <a:r>
-              <a:t>**Diverse Data Collection:** Actively seek out and incorporate data from underrepresented groups to ensure comprehensive coverage and reduce selection bias.</a:t>
-            </a:r>
-          </a:p>
-          <a:p>
-            <a:r>
-              <a:t>**Algorithmic Transparency and Auditing:** Regularly audit AI models for bias throughout their lifecycle, using explainable AI (XAI) techniques to understand decision-making.</a:t>
-            </a:r>
-          </a:p>
-          <a:p>
-            <a:r>
-              <a:t>**Human Oversight and Feedback Loops:** Implement human-in-the-loop systems to review and correct biased AI outputs, using human feedback to continuously refine and improve models.</a:t>
+              <a:t>Machine learning approaches treat sentiment analysis as a text classification problem, learning patterns from labeled training data.</a:t>
+            </a:r>
+          </a:p>
+          <a:p>
+            <a:r>
+              <a:t>Traditional ML models like Naive Bayes, Support Vector Machines (SVMs), and Logistic Regression were historically popular, using features like TF-IDF word vectors.</a:t>
+            </a:r>
+          </a:p>
+          <a:p>
+            <a:r>
+              <a:t>Deep learning models, particularly Convolutional Neural Networks (CNNs), Recurrent Neural Networks (RNNs/LSTMs), and Transformer-based models, now achieve state-of-the-art results.</a:t>
+            </a:r>
+          </a:p>
+          <a:p>
+            <a:r>
+              <a:t>These models can learn complex representations and contextual dependencies from raw text, often outperforming lexicon-based methods in accuracy.</a:t>
+            </a:r>
+          </a:p>
+          <a:p>
+            <a:r>
+              <a:t>Requires large, diverse, and accurately labeled datasets for training, making data acquisition and annotation a significant challenge.</a:t>
             </a:r>
           </a:p>
         </p:txBody>
@@ -4068,7 +4034,7 @@
           <a:lstStyle/>
           <a:p>
             <a:r>
-              <a:t>Sentiment Analysis: Definition and Applications</a:t>
+              <a:t>Introduction to NLP: Defining the Field</a:t>
             </a:r>
           </a:p>
         </p:txBody>
@@ -4089,32 +4055,27 @@
           <a:lstStyle/>
           <a:p>
             <a:r>
-              <a:t>Sentiment Analysis (SA), also known as opinion mining, is the computational study of peoples' opinions, sentiments, evaluations, attitudes, and emotions towards entities, events, and attributes.</a:t>
-            </a:r>
-          </a:p>
-          <a:p>
-            <a:r>
-              <a:t>Its primary goal is to determine the emotional tone behind a piece of text, categorizing it as positive, negative, or neutral.</a:t>
-            </a:r>
-          </a:p>
-          <a:p>
-            <a:r>
-              <a:t>Applications span diverse fields, including customer feedback analysis, social media monitoring, political polling, and market research.</a:t>
-            </a:r>
-          </a:p>
-          <a:p>
-            <a:r>
-              <a:t>SA is crucial for businesses to understand brand perception, identify product issues, and gauge campaign effectiveness in real-time.</a:t>
-            </a:r>
-          </a:p>
-          <a:p>
-            <a:r>
-              <a:t>Beyond simple polarity, advanced SA can detect nuances like sarcasm, irony, and the intensity of emotions, offering deeper insights.</a:t>
-            </a:r>
-          </a:p>
-          <a:p>
-            <a:r>
-              <a:t>It plays a vital role in reputation management, allowing organizations to respond proactively to public sentiment.</a:t>
+              <a:t>Natural Language Processing (NLP) is a subfield of AI that focuses on enabling computers to understand, interpret, and generate human language.</a:t>
+            </a:r>
+          </a:p>
+          <a:p>
+            <a:r>
+              <a:t>It combines principles from computer science, artificial intelligence, and computational linguistics to bridge the gap between human communication and machine understanding.</a:t>
+            </a:r>
+          </a:p>
+          <a:p>
+            <a:r>
+              <a:t>The core objective of NLP is to process and analyze large volumes of natural language data, extracting meaning and facilitating human-computer interaction.</a:t>
+            </a:r>
+          </a:p>
+          <a:p>
+            <a:r>
+              <a:t>NLP is inherently interdisciplinary, drawing upon theories from cognitive science and linguistics while employing advanced statistical and machine learning techniques.</a:t>
+            </a:r>
+          </a:p>
+          <a:p>
+            <a:r>
+              <a:t>The evolution of NLP has progressed from symbolic rule-based systems to statistical models, and more recently, deep learning architectures.</a:t>
             </a:r>
           </a:p>
         </p:txBody>
@@ -4153,7 +4114,7 @@
           <a:lstStyle/>
           <a:p>
             <a:r>
-              <a:t>Bias and Fairness: Policy, Ethics, and Future Directions</a:t>
+              <a:t>Sentiment Analysis: Granularity and Nuances</a:t>
             </a:r>
           </a:p>
         </p:txBody>
@@ -4174,32 +4135,27 @@
           <a:lstStyle/>
           <a:p>
             <a:r>
-              <a:t>Legal and regulatory frameworks, such as anti-discrimination laws, are increasingly being adapted to address algorithmic bias (e.g., the EU AI Act).</a:t>
-            </a:r>
-          </a:p>
-          <a:p>
-            <a:r>
-              <a:t>Ethical guidelines for AI emphasize fairness, accountability, and transparency as fundamental principles for responsible AI development and deployment.</a:t>
-            </a:r>
-          </a:p>
-          <a:p>
-            <a:r>
-              <a:t>The concept of 'fairness by design' promotes proactive integration of fairness considerations from the initial stages of AI system development.</a:t>
-            </a:r>
-          </a:p>
-          <a:p>
-            <a:r>
-              <a:t>Research focuses on developing more robust and context-aware fairness metrics, as well as universal methods for bias detection and mitigation across different AI tasks.</a:t>
-            </a:r>
-          </a:p>
-          <a:p>
-            <a:r>
-              <a:t>Interdisciplinary collaboration between AI researchers, ethicists, sociologists, and legal scholars is essential to tackle the complex societal dimensions of AI fairness.</a:t>
-            </a:r>
-          </a:p>
-          <a:p>
-            <a:r>
-              <a:t>Ongoing challenge is the trade-off between fairness and accuracy, as optimizing for one may sometimes come at the expense of the other, requiring careful societal value judgments.</a:t>
+              <a:t>Document-level sentiment analysis classifies the overall sentiment of an entire document or text block.</a:t>
+            </a:r>
+          </a:p>
+          <a:p>
+            <a:r>
+              <a:t>Sentence-level sentiment analysis determines the sentiment of each individual sentence within a document, providing finer granularity.</a:t>
+            </a:r>
+          </a:p>
+          <a:p>
+            <a:r>
+              <a:t>Aspect-based sentiment analysis (ABSA) identifies sentiments expressed towards specific entities or aspects within a sentence (e.g., 'The phone's camera is great, but its battery life is poor').</a:t>
+            </a:r>
+          </a:p>
+          <a:p>
+            <a:r>
+              <a:t>Opinion target extraction identifies the specific entities or features about which an opinion is expressed.</a:t>
+            </a:r>
+          </a:p>
+          <a:p>
+            <a:r>
+              <a:t>Distinguishing between positive/negative/neutral is basic; more advanced systems may detect emotions like joy, anger, sadness, or perform intensity scoring.</a:t>
             </a:r>
           </a:p>
         </p:txBody>
@@ -4238,7 +4194,7 @@
           <a:lstStyle/>
           <a:p>
             <a:r>
-              <a:t>Privacy Concerns: AI and Data Collection</a:t>
+              <a:t>Sentiment Analysis: Challenges and Future Directions</a:t>
             </a:r>
           </a:p>
         </p:txBody>
@@ -4259,32 +4215,27 @@
           <a:lstStyle/>
           <a:p>
             <a:r>
-              <a:t>AI systems are inherently data-hungry, requiring vast amounts of personal information for training, operation, and personalization, leading to significant privacy concerns.</a:t>
-            </a:r>
-          </a:p>
-          <a:p>
-            <a:r>
-              <a:t>Data collection often occurs through diverse channels: direct user input, device sensors, online activity tracking, public records, and third-party data brokers.</a:t>
-            </a:r>
-          </a:p>
-          <a:p>
-            <a:r>
-              <a:t>The sheer volume and variety of data (text, images, audio, biometrics) processed by AI increase the surface area for privacy breaches and misuse.</a:t>
-            </a:r>
-          </a:p>
-          <a:p>
-            <a:r>
-              <a:t>Even anonymized data can be re-identified when combined with other data sources, posing risks to individual privacy as demonstrated by various studies.</a:t>
-            </a:r>
-          </a:p>
-          <a:p>
-            <a:r>
-              <a:t>Surveillance technologies powered by AI, such as facial recognition and behavioral analytics, raise concerns about constant monitoring and the erosion of personal space.</a:t>
-            </a:r>
-          </a:p>
-          <a:p>
-            <a:r>
-              <a:t>User consent mechanisms often lack transparency and granularity, making it difficult for individuals to understand or control how their data is used by AI systems.</a:t>
+              <a:t>Detecting sarcasm and irony remains a significant challenge, as the literal meaning often contradicts the intended sentiment.</a:t>
+            </a:r>
+          </a:p>
+          <a:p>
+            <a:r>
+              <a:t>Context dependency means the sentiment of a word can change based on its surrounding words or the overall domain (e.g., 'sick' in slang vs. medical context).</a:t>
+            </a:r>
+          </a:p>
+          <a:p>
+            <a:r>
+              <a:t>Handling negation (e.g., 'not good') and intensifiers ('very good') requires careful linguistic analysis.</a:t>
+            </a:r>
+          </a:p>
+          <a:p>
+            <a:r>
+              <a:t>Cross-cultural and cross-lingual sentiment analysis is complex due to varying expressions, cultural norms, and translation difficulties.</a:t>
+            </a:r>
+          </a:p>
+          <a:p>
+            <a:r>
+              <a:t>Future research focuses on multimodal sentiment analysis, incorporating visual and auditory cues, and developing more robust context-aware models capable of subtle emotional understanding.</a:t>
             </a:r>
           </a:p>
         </p:txBody>
@@ -4323,7 +4274,7 @@
           <a:lstStyle/>
           <a:p>
             <a:r>
-              <a:t>Privacy Concerns: Legal and Regulatory Landscape</a:t>
+              <a:t>Chatbots and Language Models: Conversational AI</a:t>
             </a:r>
           </a:p>
         </p:txBody>
@@ -4344,32 +4295,27 @@
           <a:lstStyle/>
           <a:p>
             <a:r>
-              <a:t>The General Data Protection Regulation (GDPR) in the EU sets stringent rules for data processing, including requirements for lawful basis, transparency, and data subject rights.</a:t>
-            </a:r>
-          </a:p>
-          <a:p>
-            <a:r>
-              <a:t>The California Consumer Privacy Act (CCPA) and California Privacy Rights Act (CPRA) in the US grant consumers rights over their personal information, including the right to know, delete, and opt-out of sales.</a:t>
-            </a:r>
-          </a:p>
-          <a:p>
-            <a:r>
-              <a:t>HIPAA (Health Insurance Portability and Accountability Act) specifically protects sensitive health information, imposing strict rules on AI applications in healthcare.</a:t>
-            </a:r>
-          </a:p>
-          <a:p>
-            <a:r>
-              <a:t>Emerging AI-specific regulations, like the EU AI Act, aim to categorize AI systems by risk level and impose corresponding compliance requirements, including privacy safeguards.</a:t>
-            </a:r>
-          </a:p>
-          <a:p>
-            <a:r>
-              <a:t>Key legal principles such as data minimization, purpose limitation, and accountability are central to addressing privacy risks in AI development and deployment.</a:t>
-            </a:r>
-          </a:p>
-          <a:p>
-            <a:r>
-              <a:t>The challenges lie in adapting existing privacy laws, often designed for traditional data processing, to the unique characteristics and complexities of AI systems.</a:t>
+              <a:t>Chatbots are AI programs designed to simulate human conversation through text or voice, facilitating interaction between users and systems.</a:t>
+            </a:r>
+          </a:p>
+          <a:p>
+            <a:r>
+              <a:t>Their evolution began with early rule-based systems like ELIZA (1966) and PARRY (1972), which mimicked human dialogue through pattern matching.</a:t>
+            </a:r>
+          </a:p>
+          <a:p>
+            <a:r>
+              <a:t>Modern chatbots range from task-oriented bots (e.g., customer service, booking systems) to generative conversational agents capable of open-ended dialogue.</a:t>
+            </a:r>
+          </a:p>
+          <a:p>
+            <a:r>
+              <a:t>Underlying these chatbots are sophisticated language models that learn to predict and generate human-like text.</a:t>
+            </a:r>
+          </a:p>
+          <a:p>
+            <a:r>
+              <a:t>The core functionality of a chatbot relies on understanding user input (Natural Language Understanding) and generating appropriate responses (Natural Language Generation).</a:t>
             </a:r>
           </a:p>
         </p:txBody>
@@ -4408,7 +4354,7 @@
           <a:lstStyle/>
           <a:p>
             <a:r>
-              <a:t>Privacy Concerns: Privacy-Preserving AI Techniques</a:t>
+              <a:t>Chatbots and Language Models: Introduction to LMs</a:t>
             </a:r>
           </a:p>
         </p:txBody>
@@ -4429,32 +4375,27 @@
           <a:lstStyle/>
           <a:p>
             <a:r>
-              <a:t>**Differential Privacy:** Adds carefully calibrated noise to data or query results to protect individual privacy while allowing for aggregate statistical analysis.</a:t>
-            </a:r>
-          </a:p>
-          <a:p>
-            <a:r>
-              <a:t>**Federated Learning:** Enables AI models to be trained on decentralized datasets located on individual devices (e.g., smartphones) without raw data ever leaving the device, enhancing privacy.</a:t>
-            </a:r>
-          </a:p>
-          <a:p>
-            <a:r>
-              <a:t>**Homomorphic Encryption:** Allows computations to be performed directly on encrypted data without decrypting it first, providing strong privacy guarantees for cloud-based AI processing.</a:t>
-            </a:r>
-          </a:p>
-          <a:p>
-            <a:r>
-              <a:t>**Secure Multi-Party Computation (SMC):** Allows multiple parties to jointly compute a function over their inputs while keeping those inputs private from each other.</a:t>
-            </a:r>
-          </a:p>
-          <a:p>
-            <a:r>
-              <a:t>**Generative Adversarial Networks (GANs) for Synthetic Data:** Can generate synthetic data that mimics the statistical properties of real data but contains no actual individual records, used for training models.</a:t>
-            </a:r>
-          </a:p>
-          <a:p>
-            <a:r>
-              <a:t>**Anonymization and Pseudonymization:** Techniques that remove or replace direct identifiers in data to reduce the risk of re-identification, though not foolproof against advanced attacks.</a:t>
+              <a:t>A language model (LM) is a probabilistic model that assigns a probability to a sequence of words or predicts the next word in a sequence.</a:t>
+            </a:r>
+          </a:p>
+          <a:p>
+            <a:r>
+              <a:t>N-gram models were early statistical LMs that estimated the probability of a word given the preceding N-1 words based on their frequency in training corpora.</a:t>
+            </a:r>
+          </a:p>
+          <a:p>
+            <a:r>
+              <a:t>They operate on the Markov assumption, where the prediction of the next word depends only on a fixed number of preceding words, simplifying computation.</a:t>
+            </a:r>
+          </a:p>
+          <a:p>
+            <a:r>
+              <a:t>While simple and interpretable, N-gram models suffer from data sparsity for longer N-grams and cannot capture long-range dependencies.</a:t>
+            </a:r>
+          </a:p>
+          <a:p>
+            <a:r>
+              <a:t>Language models are fundamental for various NLP tasks, including speech recognition, machine translation, and text generation, forming the 'brain' of many conversational systems.</a:t>
             </a:r>
           </a:p>
         </p:txBody>
@@ -4493,7 +4434,7 @@
           <a:lstStyle/>
           <a:p>
             <a:r>
-              <a:t>Privacy Concerns: Balancing Innovation and Privacy</a:t>
+              <a:t>Chatbots and Language Models: Neural Language Models</a:t>
             </a:r>
           </a:p>
         </p:txBody>
@@ -4514,32 +4455,27 @@
           <a:lstStyle/>
           <a:p>
             <a:r>
-              <a:t>Achieving a balance between leveraging data for AI innovation and protecting individual privacy is a fundamental challenge for policymakers and developers.</a:t>
-            </a:r>
-          </a:p>
-          <a:p>
-            <a:r>
-              <a:t>Overly restrictive privacy regulations can stifle AI research and development, particularly for applications requiring extensive personal data.</a:t>
-            </a:r>
-          </a:p>
-          <a:p>
-            <a:r>
-              <a:t>Lack of adequate privacy safeguards, conversely, can lead to public distrust, ethical breaches, and potential societal harms, hindering AI adoption.</a:t>
-            </a:r>
-          </a:p>
-          <a:p>
-            <a:r>
-              <a:t>The 'privacy paradox' describes the discrepancy between individuals' expressed privacy concerns and their actual behavior in sharing personal data online.</a:t>
-            </a:r>
-          </a:p>
-          <a:p>
-            <a:r>
-              <a:t>Strategies for balance include 'Privacy-by-Design' principles, ensuring privacy is baked into AI systems from conception, rather than being an afterthought.</a:t>
-            </a:r>
-          </a:p>
-          <a:p>
-            <a:r>
-              <a:t>Promoting ethical data governance frameworks and fostering a culture of responsible data stewardship within organizations are essential for navigating this balance.</a:t>
+              <a:t>Neural language models (NLMs) emerged to overcome the limitations of N-gram models by using continuous vector representations (embeddings) for words.</a:t>
+            </a:r>
+          </a:p>
+          <a:p>
+            <a:r>
+              <a:t>Recurrent Neural Networks (RNNs), specifically Long Short-Term Memory (LSTM) and Gated Recurrent Unit (GRU) networks, were instrumental.</a:t>
+            </a:r>
+          </a:p>
+          <a:p>
+            <a:r>
+              <a:t>RNNs process sequences word by word, maintaining an internal 'state' that allows them to capture dependencies over longer sequences of text.</a:t>
+            </a:r>
+          </a:p>
+          <a:p>
+            <a:r>
+              <a:t>LSTMs and GRUs address the vanishing gradient problem inherent in vanilla RNNs, enabling them to learn and remember information over much longer contexts.</a:t>
+            </a:r>
+          </a:p>
+          <a:p>
+            <a:r>
+              <a:t>These models learn rich, distributed representations of words and sentences, improving performance on tasks requiring nuanced contextual understanding.</a:t>
             </a:r>
           </a:p>
         </p:txBody>
@@ -4578,7 +4514,7 @@
           <a:lstStyle/>
           <a:p>
             <a:r>
-              <a:t>Privacy Concerns: Future of Privacy in AI</a:t>
+              <a:t>Chatbots and Language Models: Transformer Architecture and LLMs</a:t>
             </a:r>
           </a:p>
         </p:txBody>
@@ -4599,32 +4535,27 @@
           <a:lstStyle/>
           <a:p>
             <a:r>
-              <a:t>The advent of increasingly sophisticated AI models and ubiquitous data collection necessitates continuous evolution of privacy safeguards and regulatory frameworks.</a:t>
-            </a:r>
-          </a:p>
-          <a:p>
-            <a:r>
-              <a:t>Research into robust and scalable privacy-preserving AI (PPAI) techniques will continue to be critical for unlocking AI's potential in sensitive domains like healthcare.</a:t>
-            </a:r>
-          </a:p>
-          <a:p>
-            <a:r>
-              <a:t>The concept of 'data sovereignty,' empowering individuals with greater control over their personal data and its use by AI, is gaining traction.</a:t>
-            </a:r>
-          </a:p>
-          <a:p>
-            <a:r>
-              <a:t>Developing AI systems that are transparent about their data usage and provide intelligible explanations for privacy-related decisions will enhance user trust.</a:t>
-            </a:r>
-          </a:p>
-          <a:p>
-            <a:r>
-              <a:t>International cooperation will be vital to establish harmonized privacy standards for AI, addressing the global nature of data flows and AI deployments.</a:t>
-            </a:r>
-          </a:p>
-          <a:p>
-            <a:r>
-              <a:t>The ongoing challenge is to anticipate future privacy risks posed by novel AI applications (e.g., brain-computer interfaces, pervasive biometric AI) and develop proactive solutions.</a:t>
+              <a:t>The Transformer architecture, introduced in 2017, revolutionized LMs by replacing recurrence with a self-attention mechanism, allowing parallel processing of input sequences.</a:t>
+            </a:r>
+          </a:p>
+          <a:p>
+            <a:r>
+              <a:t>Self-attention enables the model to weigh the importance of different words in the input sequence when processing each word, capturing global dependencies.</a:t>
+            </a:r>
+          </a:p>
+          <a:p>
+            <a:r>
+              <a:t>Large Language Models (LLMs) like BERT, GPT series (GPT-3, GPT-4), T5, and LLaMA are built upon the Transformer architecture and pre-trained on massive text datasets.</a:t>
+            </a:r>
+          </a:p>
+          <a:p>
+            <a:r>
+              <a:t>Pre-training involves tasks like masked language modeling and next-sentence prediction, allowing models to learn deep contextual language representations.</a:t>
+            </a:r>
+          </a:p>
+          <a:p>
+            <a:r>
+              <a:t>Fine-tuning these pre-trained models on specific downstream tasks (e.g., question answering, summarization) achieves state-of-the-art results with less task-specific data.</a:t>
             </a:r>
           </a:p>
         </p:txBody>
@@ -4663,7 +4594,7 @@
           <a:lstStyle/>
           <a:p>
             <a:r>
-              <a:t>Explainable AI (XAI): The Need for Interpretability</a:t>
+              <a:t>Chatbots and Language Models: Applications and Limitations of LLMs</a:t>
             </a:r>
           </a:p>
         </p:txBody>
@@ -4684,32 +4615,27 @@
           <a:lstStyle/>
           <a:p>
             <a:r>
-              <a:t>Explainable AI (XAI) refers to methods and techniques that make AI systems understandable to humans, addressing the 'black box' problem of complex machine learning models.</a:t>
-            </a:r>
-          </a:p>
-          <a:p>
-            <a:r>
-              <a:t>The need for XAI stems from requirements for transparency, accountability, and trust, especially in high-stakes domains like healthcare, finance, and autonomous systems.</a:t>
-            </a:r>
-          </a:p>
-          <a:p>
-            <a:r>
-              <a:t>**Trust:** Users and stakeholders are more likely to trust an AI system if they understand its reasoning and can verify its decisions.</a:t>
-            </a:r>
-          </a:p>
-          <a:p>
-            <a:r>
-              <a:t>**Accountability:** XAI helps assign responsibility when AI systems make errors or produce biased outcomes, supporting regulatory compliance.</a:t>
-            </a:r>
-          </a:p>
-          <a:p>
-            <a:r>
-              <a:t>**Debugging and Improvement:** Explanations can help developers identify and fix flaws, biases, or unexpected behaviors within AI models.</a:t>
-            </a:r>
-          </a:p>
-          <a:p>
-            <a:r>
-              <a:t>**Regulatory Compliance:** Emerging regulations (e.g., GDPR's 'right to explanation', EU AI Act) are increasingly mandating interpretability for certain AI applications.</a:t>
+              <a:t>LLMs power highly sophisticated chatbots capable of complex conversations, content creation (articles, code), summarization, and creative writing.</a:t>
+            </a:r>
+          </a:p>
+          <a:p>
+            <a:r>
+              <a:t>They excel at zero-shot and few-shot learning, performing tasks without extensive fine-tuning by leveraging their vast pre-trained knowledge.</a:t>
+            </a:r>
+          </a:p>
+          <a:p>
+            <a:r>
+              <a:t>Limitations include the potential for generating factually incorrect information ('hallucinations'), exhibiting biases present in their training data, and a lack of true common sense reasoning.</a:t>
+            </a:r>
+          </a:p>
+          <a:p>
+            <a:r>
+              <a:t>Ethical concerns arise regarding their misuse for misinformation, deepfakes, copyright infringement, and the environmental impact of their massive training computations.</a:t>
+            </a:r>
+          </a:p>
+          <a:p>
+            <a:r>
+              <a:t>Ongoing research focuses on improving factual accuracy, reducing bias, increasing transparency, and developing more controllable and aligned LLMs.</a:t>
             </a:r>
           </a:p>
         </p:txBody>
@@ -4748,7 +4674,7 @@
           <a:lstStyle/>
           <a:p>
             <a:r>
-              <a:t>Explainable AI (XAI): Types of Explanations and Models</a:t>
+              <a:t>Ethical Issues in AI: Foundations of Responsible AI</a:t>
             </a:r>
           </a:p>
         </p:txBody>
@@ -4769,32 +4695,27 @@
           <a:lstStyle/>
           <a:p>
             <a:r>
-              <a:t>**Local Interpretability:** Explains why a model made a specific prediction for a single instance (e.g., why a loan was denied to a particular applicant).</a:t>
-            </a:r>
-          </a:p>
-          <a:p>
-            <a:r>
-              <a:t>**Global Interpretability:** Provides an understanding of the overall model behavior, how it generally makes decisions across its entire input space.</a:t>
-            </a:r>
-          </a:p>
-          <a:p>
-            <a:r>
-              <a:t>**Intrinsic Interpretability:** Refers to models that are inherently understandable due to their simple structure (e.g., linear regression, decision trees, rule-based systems).</a:t>
-            </a:r>
-          </a:p>
-          <a:p>
-            <a:r>
-              <a:t>**Post-hoc Interpretability:** Applies explanation techniques to complex, opaque models (e.g., deep neural networks) after they have been trained.</a:t>
-            </a:r>
-          </a:p>
-          <a:p>
-            <a:r>
-              <a:t>Explanations can take various forms: feature importance scores, decision rules, counterfactual examples, textual justifications, or visual saliency maps.</a:t>
-            </a:r>
-          </a:p>
-          <a:p>
-            <a:r>
-              <a:t>The choice of XAI technique depends on the model type, the audience for the explanation (developer, user, regulator), and the specific context of the AI application.</a:t>
+              <a:t>The rapid advancement and widespread deployment of AI necessitate a rigorous examination of its ethical implications and societal impact.</a:t>
+            </a:r>
+          </a:p>
+          <a:p>
+            <a:r>
+              <a:t>AI ethics is a field dedicated to understanding and addressing the moral, social, and legal challenges posed by the development and use of artificial intelligence.</a:t>
+            </a:r>
+          </a:p>
+          <a:p>
+            <a:r>
+              <a:t>Responsible AI development requires developers and deployers to consider the broader consequences of their creations beyond technical functionality.</a:t>
+            </a:r>
+          </a:p>
+          <a:p>
+            <a:r>
+              <a:t>Ignoring ethical considerations can lead to unintended harm, erosion of public trust, and regulatory backlash, hindering AI's positive potential.</a:t>
+            </a:r>
+          </a:p>
+          <a:p>
+            <a:r>
+              <a:t>Frameworks for ethical AI often emphasize human-centric design, ensuring AI serves human well-being and respects fundamental rights.</a:t>
             </a:r>
           </a:p>
         </p:txBody>
@@ -4833,7 +4754,7 @@
           <a:lstStyle/>
           <a:p>
             <a:r>
-              <a:t>Explainable AI (XAI): Key Techniques and Algorithms</a:t>
+              <a:t>Ethical Issues in AI: Core Ethical Principles</a:t>
             </a:r>
           </a:p>
         </p:txBody>
@@ -4854,32 +4775,27 @@
           <a:lstStyle/>
           <a:p>
             <a:r>
-              <a:t>**LIME (Local Interpretable Model-agnostic Explanations):** Explains individual predictions by locally approximating the black-box model with an interpretable model (e.g., linear model).</a:t>
-            </a:r>
-          </a:p>
-          <a:p>
-            <a:r>
-              <a:t>**SHAP (SHapley Additive exPlanations):** Based on cooperative game theory, SHAP attributes the contribution of each feature to a prediction, providing consistent and robust explanations.</a:t>
-            </a:r>
-          </a:p>
-          <a:p>
-            <a:r>
-              <a:t>**Feature Importance (Permutation Importance, Gini Importance):** Measures how much a model's performance decreases when a specific feature's values are permuted or removed.</a:t>
-            </a:r>
-          </a:p>
-          <a:p>
-            <a:r>
-              <a:t>**Partial Dependence Plots (PDPs) and Individual Conditional Expectation (ICE) Plots:** Visualize the marginal effect of one or two features on the predicted outcome, globally or locally.</a:t>
-            </a:r>
-          </a:p>
-          <a:p>
-            <a:r>
-              <a:t>**Saliency Maps (for Computer Vision):** Highlight regions in an input image that are most influential for a CNN's prediction, showing what the model 'looked' at.</a:t>
-            </a:r>
-          </a:p>
-          <a:p>
-            <a:r>
-              <a:t>**Counterfactual Explanations:** Identify the smallest change to an input that would alter the model's prediction to a desired outcome (e.g., 'If your income were X, you would get the loan').</a:t>
+              <a:t>Transparency and Explainability: AI systems should be comprehensible, allowing users to understand how decisions are made, especially in critical applications.</a:t>
+            </a:r>
+          </a:p>
+          <a:p>
+            <a:r>
+              <a:t>Fairness and Non-discrimination: AI systems must treat all individuals and groups equitably, avoiding unfair bias in outcomes or access.</a:t>
+            </a:r>
+          </a:p>
+          <a:p>
+            <a:r>
+              <a:t>Accountability and Responsibility: Clear mechanisms must be established to determine who is responsible for AI system actions and their consequences.</a:t>
+            </a:r>
+          </a:p>
+          <a:p>
+            <a:r>
+              <a:t>Beneficence and Non-maleficence: AI should be designed to promote human well-being and prevent harm, both direct and indirect.</a:t>
+            </a:r>
+          </a:p>
+          <a:p>
+            <a:r>
+              <a:t>Privacy and Data Governance: Respecting individual privacy and ensuring secure, ethical handling of data are paramount for AI systems.</a:t>
             </a:r>
           </a:p>
         </p:txBody>
@@ -4918,7 +4834,7 @@
           <a:lstStyle/>
           <a:p>
             <a:r>
-              <a:t>Explainable AI (XAI): Benefits and Challenges</a:t>
+              <a:t>Ethical Issues in AI: Societal Impact and Displacement</a:t>
             </a:r>
           </a:p>
         </p:txBody>
@@ -4939,32 +4855,27 @@
           <a:lstStyle/>
           <a:p>
             <a:r>
-              <a:t>**Benefits:** Enhances user trust and adoption, facilitates debugging and auditing of AI systems, aids in compliance with ethical and legal standards, and fosters scientific discovery.</a:t>
-            </a:r>
-          </a:p>
-          <a:p>
-            <a:r>
-              <a:t>**Challenges of Fidelity vs. Interpretability:** Often, there's a trade-off between model accuracy and the simplicity required for human interpretability; highly complex models are harder to explain.</a:t>
-            </a:r>
-          </a:p>
-          <a:p>
-            <a:r>
-              <a:t>**Complexity of Explanations:** Generating human-understandable explanations for highly complex, high-dimensional models can itself be a computationally intensive and difficult task.</a:t>
-            </a:r>
-          </a:p>
-          <a:p>
-            <a:r>
-              <a:t>**Evaluation of Explanations:** Objectively evaluating the quality, completeness, and usefulness of an explanation remains an open research problem, often relying on subjective human judgment.</a:t>
-            </a:r>
-          </a:p>
-          <a:p>
-            <a:r>
-              <a:t>**Context Dependence:** What constitutes a 'good' explanation varies significantly based on the user's background, task, and the specific domain of the AI application.</a:t>
-            </a:r>
-          </a:p>
-          <a:p>
-            <a:r>
-              <a:t>**Ethical Implications:** XAI can reveal hidden biases or flaws, but also raise questions about selective explanations or the potential for 'explanation laundering' to hide problematic behavior.</a:t>
+              <a:t>Job automation driven by AI can lead to significant workforce displacement, particularly in routine and repetitive tasks, raising concerns about economic inequality.</a:t>
+            </a:r>
+          </a:p>
+          <a:p>
+            <a:r>
+              <a:t>The deployment of AI in critical sectors like healthcare, education, and finance can exacerbate existing societal disparities if not carefully managed.</a:t>
+            </a:r>
+          </a:p>
+          <a:p>
+            <a:r>
+              <a:t>AI-driven personalization algorithms can create 'filter bubbles' or 'echo chambers,' potentially polarizing public discourse and impacting democratic processes.</a:t>
+            </a:r>
+          </a:p>
+          <a:p>
+            <a:r>
+              <a:t>Autonomous decision-making systems in areas like criminal justice or credit scoring can perpetuate and amplify systemic biases, impacting vulnerable populations.</a:t>
+            </a:r>
+          </a:p>
+          <a:p>
+            <a:r>
+              <a:t>Impact on human interaction and social structures, with AI potentially replacing or mediating human relationships, raises questions about authenticity and emotional intelligence.</a:t>
             </a:r>
           </a:p>
         </p:txBody>
@@ -5003,7 +4914,7 @@
           <a:lstStyle/>
           <a:p>
             <a:r>
-              <a:t>Sentiment Analysis: Methodologies and Techniques</a:t>
+              <a:t>Introduction to NLP: Historical Context and Evolution</a:t>
             </a:r>
           </a:p>
         </p:txBody>
@@ -5024,32 +4935,27 @@
           <a:lstStyle/>
           <a:p>
             <a:r>
-              <a:t>Lexicon-based approaches utilize pre-defined dictionaries of words annotated with their sentiment scores (e.g., SentiWordNet, VADER).</a:t>
-            </a:r>
-          </a:p>
-          <a:p>
-            <a:r>
-              <a:t>Machine Learning (ML) methods, such as Naive Bayes, Support Vector Machines (SVMs), and Logistic Regression, learn sentiment classifications from labeled datasets.</a:t>
-            </a:r>
-          </a:p>
-          <a:p>
-            <a:r>
-              <a:t>Deep Learning (DL) models, particularly Recurrent Neural Networks (RNNs) like LSTMs and transformers, excel at capturing complex contextual patterns and sequential dependencies in text.</a:t>
-            </a:r>
-          </a:p>
-          <a:p>
-            <a:r>
-              <a:t>Rule-based systems employ linguistic rules and patterns to identify sentiment-bearing phrases and clauses, often combined with lexicon methods.</a:t>
-            </a:r>
-          </a:p>
-          <a:p>
-            <a:r>
-              <a:t>Hybrid approaches integrate lexicon, ML, and DL techniques to leverage the strengths of each, improving accuracy and robustness.</a:t>
-            </a:r>
-          </a:p>
-          <a:p>
-            <a:r>
-              <a:t>Feature engineering, including N-grams, TF-IDF, and word embeddings (e.g., Word2Vec, GloVe), is critical for representing text data effectively for ML/DL models.</a:t>
+              <a:t>Early NLP efforts in the 1950s and 60s focused on symbolic AI, utilizing hand-crafted rules and expert systems (e.g., ELIZA, SHRDLU).</a:t>
+            </a:r>
+          </a:p>
+          <a:p>
+            <a:r>
+              <a:t>The 1980s and 90s saw a shift towards statistical NLP, driven by increased computational power and the availability of large text corpora.</a:t>
+            </a:r>
+          </a:p>
+          <a:p>
+            <a:r>
+              <a:t>Machine learning techniques like Hidden Markov Models (HMMs) and Support Vector Machines (SVMs) became prominent for tasks such as part-of-speech tagging and parsing.</a:t>
+            </a:r>
+          </a:p>
+          <a:p>
+            <a:r>
+              <a:t>The deep learning revolution in the 2010s transformed NLP, with neural networks (RNNs, LSTMs, Transformers) achieving state-of-the-art performance across various benchmarks.</a:t>
+            </a:r>
+          </a:p>
+          <a:p>
+            <a:r>
+              <a:t>Current trends emphasize large pre-trained language models (LLMs) that learn universal language representations from vast datasets.</a:t>
             </a:r>
           </a:p>
         </p:txBody>
@@ -5088,7 +4994,7 @@
           <a:lstStyle/>
           <a:p>
             <a:r>
-              <a:t>Explainable AI (XAI): Applications and Future Directions</a:t>
+              <a:t>Ethical Issues in AI: Autonomy and Control</a:t>
             </a:r>
           </a:p>
         </p:txBody>
@@ -5109,32 +5015,27 @@
           <a:lstStyle/>
           <a:p>
             <a:r>
-              <a:t>**Healthcare:** XAI aids clinicians in understanding AI diagnostic recommendations, fostering trust and improving patient care by justifying predictions.</a:t>
-            </a:r>
-          </a:p>
-          <a:p>
-            <a:r>
-              <a:t>**Finance:** Critical for loan applications, fraud detection, and regulatory compliance, XAI provides justifications for decisions impacting individuals and institutions.</a:t>
-            </a:r>
-          </a:p>
-          <a:p>
-            <a:r>
-              <a:t>**Autonomous Systems:** Essential for building trust and safety in self-driving cars or drones, explaining why a system made a particular decision in a critical situation.</a:t>
-            </a:r>
-          </a:p>
-          <a:p>
-            <a:r>
-              <a:t>**Scientific Discovery:** XAI can help scientists uncover new relationships and hypotheses by making complex AI models more transparent, accelerating research.</a:t>
-            </a:r>
-          </a:p>
-          <a:p>
-            <a:r>
-              <a:t>Future research focuses on developing more robust, user-centric, and interactive XAI tools that can adapt explanations to different stakeholders and provide causal reasoning.</a:t>
-            </a:r>
-          </a:p>
-          <a:p>
-            <a:r>
-              <a:t>Integrating XAI seamlessly into the entire AI development pipeline, from data preparation to deployment and monitoring, is a key objective for responsible AI.</a:t>
+              <a:t>The increasing autonomy of AI systems, especially in areas like self-driving cars or autonomous weapons, raises questions about human control and intervention.</a:t>
+            </a:r>
+          </a:p>
+          <a:p>
+            <a:r>
+              <a:t>Defining the appropriate level of human oversight and 'human-in-the-loop' mechanisms is crucial for safety and ethical decision-making.</a:t>
+            </a:r>
+          </a:p>
+          <a:p>
+            <a:r>
+              <a:t>The delegation of significant decision-making power to AI systems can diminish human agency and moral responsibility in critical contexts.</a:t>
+            </a:r>
+          </a:p>
+          <a:p>
+            <a:r>
+              <a:t>Legal implications of autonomous AI include determining liability for accidents or errors when no direct human control is exercised.</a:t>
+            </a:r>
+          </a:p>
+          <a:p>
+            <a:r>
+              <a:t>The 'control problem' in advanced AI explores how to ensure superintelligent AI systems remain aligned with human values and goals without unintended consequences.</a:t>
             </a:r>
           </a:p>
         </p:txBody>
@@ -5173,7 +5074,7 @@
           <a:lstStyle/>
           <a:p>
             <a:r>
-              <a:t>Future of AI: Emerging Trends and Technologies</a:t>
+              <a:t>Ethical Issues in AI: Accountability and Responsibility</a:t>
             </a:r>
           </a:p>
         </p:txBody>
@@ -5194,32 +5095,27 @@
           <a:lstStyle/>
           <a:p>
             <a:r>
-              <a:t>**Generative AI and Foundation Models:** The rapid evolution of large-scale pre-trained models (e.g., GPT-4, LLaMA) capable of generating diverse content (text, images, code, audio) is transforming industries.</a:t>
-            </a:r>
-          </a:p>
-          <a:p>
-            <a:r>
-              <a:t>**Multimodal AI:** Integration of various data types (text, vision, audio, sensor data) to create AI systems with a more comprehensive understanding of the world, mimicking human perception.</a:t>
-            </a:r>
-          </a:p>
-          <a:p>
-            <a:r>
-              <a:t>**Embodied AI and Robotics:** Advancements in robotics, reinforcement learning, and sim-to-real transfer are enabling AI agents to interact with and learn from the physical world.</a:t>
-            </a:r>
-          </a:p>
-          <a:p>
-            <a:r>
-              <a:t>**Small AI / Edge AI:** Development of efficient AI models that can run on resource-constrained devices at the 'edge' of networks, reducing latency and enhancing privacy.</a:t>
-            </a:r>
-          </a:p>
-          <a:p>
-            <a:r>
-              <a:t>**AI for Science:** Applying AI to accelerate scientific discovery, from drug design and material science to climate modeling and fundamental physics research.</a:t>
-            </a:r>
-          </a:p>
-          <a:p>
-            <a:r>
-              <a:t>**Neuro-symbolic AI:** Combining the strengths of deep learning (pattern recognition) with symbolic AI (reasoning, knowledge representation) to achieve more robust and explainable intelligence.</a:t>
+              <a:t>Establishing clear lines of accountability for AI system failures, harms, or biased outcomes is complex due to the distributed nature of development and deployment.</a:t>
+            </a:r>
+          </a:p>
+          <a:p>
+            <a:r>
+              <a:t>Traditional legal frameworks may not adequately address AI-specific issues, necessitating new regulations, certifications, and standards.</a:t>
+            </a:r>
+          </a:p>
+          <a:p>
+            <a:r>
+              <a:t>The 'black box' nature of many advanced AI models (e.g., deep learning) makes it difficult to trace causality and pinpoint responsibility for erroneous decisions.</a:t>
+            </a:r>
+          </a:p>
+          <a:p>
+            <a:r>
+              <a:t>Proposals for addressing accountability include requiring impact assessments, mandating human oversight, and developing formal auditing mechanisms for AI systems.</a:t>
+            </a:r>
+          </a:p>
+          <a:p>
+            <a:r>
+              <a:t>The concept of 'moral agency' for AI systems is debated, but current consensus places moral responsibility firmly with human designers, deployers, and operators.</a:t>
             </a:r>
           </a:p>
         </p:txBody>
@@ -5258,7 +5154,7 @@
           <a:lstStyle/>
           <a:p>
             <a:r>
-              <a:t>Future of AI: Societal Transformation and Impact</a:t>
+              <a:t>Bias and Fairness: Understanding Algorithmic Discrimination</a:t>
             </a:r>
           </a:p>
         </p:txBody>
@@ -5279,32 +5175,27 @@
           <a:lstStyle/>
           <a:p>
             <a:r>
-              <a:t>**Workforce Transformation:** AI will automate many routine tasks, potentially displacing jobs but also creating new roles requiring human-AI collaboration and higher-order skills.</a:t>
-            </a:r>
-          </a:p>
-          <a:p>
-            <a:r>
-              <a:t>**Healthcare Revolution:** Personalized medicine, advanced diagnostics, AI-driven drug discovery, and intelligent health management systems promise to significantly improve human well-being.</a:t>
-            </a:r>
-          </a:p>
-          <a:p>
-            <a:r>
-              <a:t>**Education Enhancement:** AI tutors, adaptive learning platforms, and intelligent content creation tools could personalize education and make learning more accessible and effective.</a:t>
-            </a:r>
-          </a:p>
-          <a:p>
-            <a:r>
-              <a:t>**Economic Growth and Productivity:** AI is expected to drive substantial economic growth through increased automation, efficiency, and innovation across sectors.</a:t>
-            </a:r>
-          </a:p>
-          <a:p>
-            <a:r>
-              <a:t>**Ethical Governance:** The increasing power of AI necessitates robust global governance frameworks, policies, and ethical guidelines to ensure responsible development and deployment.</a:t>
-            </a:r>
-          </a:p>
-          <a:p>
-            <a:r>
-              <a:t>**Environmental Impact:** While AI can optimize energy grids and climate models, the energy consumption of large-scale AI models also presents an environmental challenge.</a:t>
+              <a:t>Bias in AI refers to systematic errors or prejudices in an AI system's output that lead to unfair or discriminatory outcomes against certain groups.</a:t>
+            </a:r>
+          </a:p>
+          <a:p>
+            <a:r>
+              <a:t>It can manifest in various stages of the AI lifecycle, from data collection and model training to deployment and interpretation.</a:t>
+            </a:r>
+          </a:p>
+          <a:p>
+            <a:r>
+              <a:t>Fairness in AI aims to ensure that AI systems produce equitable outcomes for different individuals and groups, preventing unjust or prejudicial treatment.</a:t>
+            </a:r>
+          </a:p>
+          <a:p>
+            <a:r>
+              <a:t>Understanding the sources and manifestations of bias is critical for building trustworthy and ethically responsible AI systems.</a:t>
+            </a:r>
+          </a:p>
+          <a:p>
+            <a:r>
+              <a:t>Ignoring bias perpetuates and amplifies existing societal inequalities, leading to real-world harm and erosion of trust in AI.</a:t>
             </a:r>
           </a:p>
         </p:txBody>
@@ -5343,7 +5234,7 @@
           <a:lstStyle/>
           <a:p>
             <a:r>
-              <a:t>Future of AI: Towards Artificial General Intelligence (AGI)</a:t>
+              <a:t>Bias and Fairness: Sources of Data Bias</a:t>
             </a:r>
           </a:p>
         </p:txBody>
@@ -5364,32 +5255,27 @@
           <a:lstStyle/>
           <a:p>
             <a:r>
-              <a:t>Artificial General Intelligence (AGI) refers to hypothetical AI that can understand, learn, and apply intelligence to any intellectual task that a human being can.</a:t>
-            </a:r>
-          </a:p>
-          <a:p>
-            <a:r>
-              <a:t>Current AI, often termed Narrow AI, excels at specific tasks but lacks the versatility, common sense, and adaptability characteristic of human intelligence.</a:t>
-            </a:r>
-          </a:p>
-          <a:p>
-            <a:r>
-              <a:t>The path to AGI involves overcoming fundamental challenges in common sense reasoning, transfer learning, open-ended learning, and multimodal integration.</a:t>
-            </a:r>
-          </a:p>
-          <a:p>
-            <a:r>
-              <a:t>Debates exist on the feasibility and timelines for AGI, with predictions ranging from decades to centuries, or even questions about its ultimate attainability.</a:t>
-            </a:r>
-          </a:p>
-          <a:p>
-            <a:r>
-              <a:t>The development of AGI would represent a profound inflection point for humanity, potentially leading to unprecedented technological progress but also existential risks.</a:t>
-            </a:r>
-          </a:p>
-          <a:p>
-            <a:r>
-              <a:t>Research into AGI requires careful consideration of safety, alignment with human values, and robust control mechanisms to prevent unintended consequences.</a:t>
+              <a:t>Historical bias reflects societal prejudices that existed when the data was collected (e.g., historical loan approval rates reflecting past discrimination).</a:t>
+            </a:r>
+          </a:p>
+          <a:p>
+            <a:r>
+              <a:t>Selection bias occurs when the data used to train the model is not representative of the real-world population or distribution the model will encounter.</a:t>
+            </a:r>
+          </a:p>
+          <a:p>
+            <a:r>
+              <a:t>Measurement bias arises from inaccuracies or inconsistencies in how data is collected or labeled, leading to skewed representations.</a:t>
+            </a:r>
+          </a:p>
+          <a:p>
+            <a:r>
+              <a:t>Stereotype bias can be introduced when training data reinforces existing societal stereotypes, leading the model to learn and perpetuate them.</a:t>
+            </a:r>
+          </a:p>
+          <a:p>
+            <a:r>
+              <a:t>Reporting bias occurs when certain outcomes or behaviors are more likely to be reported or documented than others, skewing the available data.</a:t>
             </a:r>
           </a:p>
         </p:txBody>
@@ -5428,7 +5314,7 @@
           <a:lstStyle/>
           <a:p>
             <a:r>
-              <a:t>Future of AI: Challenges and Risks</a:t>
+              <a:t>Bias and Fairness: Algorithmic Bias</a:t>
             </a:r>
           </a:p>
         </p:txBody>
@@ -5449,32 +5335,27 @@
           <a:lstStyle/>
           <a:p>
             <a:r>
-              <a:t>**Misuse and Malicious Use:** The potential for AI to be used for autonomous weapons, mass surveillance, cyberattacks, or sophisticated disinformation campaigns.</a:t>
-            </a:r>
-          </a:p>
-          <a:p>
-            <a:r>
-              <a:t>**Existential Risk:** Advanced AGI or superintelligence, if not properly aligned with human values, could pose an existential threat to humanity.</a:t>
-            </a:r>
-          </a:p>
-          <a:p>
-            <a:r>
-              <a:t>**Geopolitical Instability:** The global race for AI supremacy could exacerbate international tensions and create new forms of power imbalance.</a:t>
-            </a:r>
-          </a:p>
-          <a:p>
-            <a:r>
-              <a:t>**Exacerbation of Inequality:** Unequal access to AI technologies and benefits could widen socioeconomic divides, both within and between nations.</a:t>
-            </a:r>
-          </a:p>
-          <a:p>
-            <a:r>
-              <a:t>**Loss of Control:** As AI systems become more complex and autonomous, maintaining human oversight and control over their decision-making processes becomes increasingly challenging.</a:t>
-            </a:r>
-          </a:p>
-          <a:p>
-            <a:r>
-              <a:t>**Ethical Dilemmas:** Continual emergence of complex ethical questions that require careful societal deliberation and robust regulatory responses.</a:t>
+              <a:t>Algorithmic bias can stem from the choices made during model design, feature engineering, or objective function definition, even with unbiased data.</a:t>
+            </a:r>
+          </a:p>
+          <a:p>
+            <a:r>
+              <a:t>Proxy variables: models may inadvertently use seemingly neutral features (e.g., zip code) as proxies for sensitive attributes (e.g., race), leading to indirect discrimination.</a:t>
+            </a:r>
+          </a:p>
+          <a:p>
+            <a:r>
+              <a:t>Amplification of existing biases: even small biases in training data can be magnified by complex learning algorithms, leading to significantly biased outputs.</a:t>
+            </a:r>
+          </a:p>
+          <a:p>
+            <a:r>
+              <a:t>Interaction effects: intricate relationships between features can make it difficult to pinpoint where bias originates or how it manifests.</a:t>
+            </a:r>
+          </a:p>
+          <a:p>
+            <a:r>
+              <a:t>Lack of group-specific optimization: models optimized for overall accuracy may perform poorly for minority groups if their data is underrepresented.</a:t>
             </a:r>
           </a:p>
         </p:txBody>
@@ -5513,7 +5394,7 @@
           <a:lstStyle/>
           <a:p>
             <a:r>
-              <a:t>Future of AI: Human-AI Collaboration and The Path Forward</a:t>
+              <a:t>Bias and Fairness: Fairness Metrics and Definitions</a:t>
             </a:r>
           </a:p>
         </p:txBody>
@@ -5534,32 +5415,347 @@
           <a:lstStyle/>
           <a:p>
             <a:r>
-              <a:t>The future is likely to be characterized by 'augmented intelligence,' where AI enhances human capabilities rather than fully replacing them, fostering new modes of collaboration.</a:t>
-            </a:r>
-          </a:p>
-          <a:p>
-            <a:r>
-              <a:t>Developing effective human-AI interfaces and interaction paradigms is crucial to maximize the benefits of intelligent systems while maintaining human agency.</a:t>
-            </a:r>
-          </a:p>
-          <a:p>
-            <a:r>
-              <a:t>Prioritizing 'responsible AI' development, emphasizing ethics, safety, fairness, privacy, and transparency from conception to deployment, is paramount.</a:t>
-            </a:r>
-          </a:p>
-          <a:p>
-            <a:r>
-              <a:t>Investing in AI literacy and continuous education across all levels of society is essential to prepare the workforce and citizenry for an AI-integrated future.</a:t>
-            </a:r>
-          </a:p>
-          <a:p>
-            <a:r>
-              <a:t>Fostering international cooperation and multi-stakeholder dialogue to develop global norms, standards, and governance mechanisms for AI development and deployment.</a:t>
-            </a:r>
-          </a:p>
-          <a:p>
-            <a:r>
-              <a:t>Embracing a proactive and adaptive approach to AI regulation, allowing for innovation while safeguarding against potential harms and societal disruption.</a:t>
+              <a:t>Demographic Parity (Statistical Parity): Requires that different protected groups receive positive outcomes at equal rates, irrespective of their input features.</a:t>
+            </a:r>
+          </a:p>
+          <a:p>
+            <a:r>
+              <a:t>Equal Opportunity: Requires that protected groups have equal true positive rates, meaning they are equally likely to be correctly identified as positive when they truly are positive.</a:t>
+            </a:r>
+          </a:p>
+          <a:p>
+            <a:r>
+              <a:t>Predictive Equality: Requires that protected groups have equal false positive rates, meaning they are equally likely to be incorrectly identified as positive.</a:t>
+            </a:r>
+          </a:p>
+          <a:p>
+            <a:r>
+              <a:t>Individual Fairness: Demands that similar individuals should receive similar outcomes, often formalized through distance metrics in feature space.</a:t>
+            </a:r>
+          </a:p>
+          <a:p>
+            <a:r>
+              <a:t>Disparate Impact: A legal concept in the US, indicating that a neutral policy or system disproportionately harms a protected group, even without explicit intent to discriminate.</a:t>
+            </a:r>
+          </a:p>
+        </p:txBody>
+      </p:sp>
+    </p:spTree>
+  </p:cSld>
+  <p:clrMapOvr>
+    <a:masterClrMapping/>
+  </p:clrMapOvr>
+</p:sld>
+</file>
+
+<file path=ppt/slides/slide36.xml><?xml version="1.0" encoding="utf-8"?>
+<p:sld xmlns:a="http://schemas.openxmlformats.org/drawingml/2006/main" xmlns:p="http://schemas.openxmlformats.org/presentationml/2006/main" xmlns:r="http://schemas.openxmlformats.org/officeDocument/2006/relationships">
+  <p:cSld>
+    <p:spTree>
+      <p:nvGrpSpPr>
+        <p:cNvPr id="1" name=""/>
+        <p:cNvGrpSpPr/>
+        <p:nvPr/>
+      </p:nvGrpSpPr>
+      <p:grpSpPr/>
+      <p:sp>
+        <p:nvSpPr>
+          <p:cNvPr id="2" name="Title 1"/>
+          <p:cNvSpPr>
+            <a:spLocks noGrp="1"/>
+          </p:cNvSpPr>
+          <p:nvPr>
+            <p:ph type="title"/>
+          </p:nvPr>
+        </p:nvSpPr>
+        <p:spPr/>
+        <p:txBody>
+          <a:bodyPr/>
+          <a:lstStyle/>
+          <a:p>
+            <a:r>
+              <a:t>Bias and Fairness: Mitigating Bias Strategies</a:t>
+            </a:r>
+          </a:p>
+        </p:txBody>
+      </p:sp>
+      <p:sp>
+        <p:nvSpPr>
+          <p:cNvPr id="3" name="Content Placeholder 2"/>
+          <p:cNvSpPr>
+            <a:spLocks noGrp="1"/>
+          </p:cNvSpPr>
+          <p:nvPr>
+            <p:ph idx="1"/>
+          </p:nvPr>
+        </p:nvSpPr>
+        <p:spPr/>
+        <p:txBody>
+          <a:bodyPr/>
+          <a:lstStyle/>
+          <a:p>
+            <a:r>
+              <a:t>Pre-processing techniques: Include data augmentation for underrepresented groups, re-weighting training samples, or debiasing word embeddings to remove social stereotypes.</a:t>
+            </a:r>
+          </a:p>
+          <a:p>
+            <a:r>
+              <a:t>In-processing techniques: Modify the learning algorithm itself, such as adding fairness constraints to the objective function or using adversarial debiasing methods during training.</a:t>
+            </a:r>
+          </a:p>
+          <a:p>
+            <a:r>
+              <a:t>Post-processing techniques: Adjust the model's predictions after training, for example, by threshold adjustment or re-calibration of scores to achieve fairness goals.</a:t>
+            </a:r>
+          </a:p>
+          <a:p>
+            <a:r>
+              <a:t>Transparency and Explainability (XAI): Critical for identifying and diagnosing bias by understanding how models arrive at their decisions.</a:t>
+            </a:r>
+          </a:p>
+          <a:p>
+            <a:r>
+              <a:t>Human-in-the-loop systems, regular auditing, and diverse development teams are essential for continuous monitoring and ethical oversight of AI systems.</a:t>
+            </a:r>
+          </a:p>
+        </p:txBody>
+      </p:sp>
+    </p:spTree>
+  </p:cSld>
+  <p:clrMapOvr>
+    <a:masterClrMapping/>
+  </p:clrMapOvr>
+</p:sld>
+</file>
+
+<file path=ppt/slides/slide37.xml><?xml version="1.0" encoding="utf-8"?>
+<p:sld xmlns:a="http://schemas.openxmlformats.org/drawingml/2006/main" xmlns:p="http://schemas.openxmlformats.org/presentationml/2006/main" xmlns:r="http://schemas.openxmlformats.org/officeDocument/2006/relationships">
+  <p:cSld>
+    <p:spTree>
+      <p:nvGrpSpPr>
+        <p:cNvPr id="1" name=""/>
+        <p:cNvGrpSpPr/>
+        <p:nvPr/>
+      </p:nvGrpSpPr>
+      <p:grpSpPr/>
+      <p:sp>
+        <p:nvSpPr>
+          <p:cNvPr id="2" name="Title 1"/>
+          <p:cNvSpPr>
+            <a:spLocks noGrp="1"/>
+          </p:cNvSpPr>
+          <p:nvPr>
+            <p:ph type="title"/>
+          </p:nvPr>
+        </p:nvSpPr>
+        <p:spPr/>
+        <p:txBody>
+          <a:bodyPr/>
+          <a:lstStyle/>
+          <a:p>
+            <a:r>
+              <a:t>Privacy Concerns: AI and Data Protection</a:t>
+            </a:r>
+          </a:p>
+        </p:txBody>
+      </p:sp>
+      <p:sp>
+        <p:nvSpPr>
+          <p:cNvPr id="3" name="Content Placeholder 2"/>
+          <p:cNvSpPr>
+            <a:spLocks noGrp="1"/>
+          </p:cNvSpPr>
+          <p:nvPr>
+            <p:ph idx="1"/>
+          </p:nvPr>
+        </p:nvSpPr>
+        <p:spPr/>
+        <p:txBody>
+          <a:bodyPr/>
+          <a:lstStyle/>
+          <a:p>
+            <a:r>
+              <a:t>AI systems, particularly those involving machine learning, are inherently data-intensive, often requiring vast amounts of personal information for training and operation.</a:t>
+            </a:r>
+          </a:p>
+          <a:p>
+            <a:r>
+              <a:t>This reliance on data raises significant privacy concerns, including unauthorized access, re-identification risks, and misuse of sensitive personal data.</a:t>
+            </a:r>
+          </a:p>
+          <a:p>
+            <a:r>
+              <a:t>Privacy concerns span the entire data lifecycle: collection, storage, processing, sharing, and eventual deletion.</a:t>
+            </a:r>
+          </a:p>
+          <a:p>
+            <a:r>
+              <a:t>The ability of AI to infer highly personal attributes (e.g., health conditions, sexual orientation, political views) from seemingly innocuous data poses a major threat to privacy.</a:t>
+            </a:r>
+          </a:p>
+          <a:p>
+            <a:r>
+              <a:t>Balancing the benefits of data-driven AI with individuals' fundamental right to privacy is a critical ethical and regulatory challenge.</a:t>
+            </a:r>
+          </a:p>
+        </p:txBody>
+      </p:sp>
+    </p:spTree>
+  </p:cSld>
+  <p:clrMapOvr>
+    <a:masterClrMapping/>
+  </p:clrMapOvr>
+</p:sld>
+</file>
+
+<file path=ppt/slides/slide38.xml><?xml version="1.0" encoding="utf-8"?>
+<p:sld xmlns:a="http://schemas.openxmlformats.org/drawingml/2006/main" xmlns:p="http://schemas.openxmlformats.org/presentationml/2006/main" xmlns:r="http://schemas.openxmlformats.org/officeDocument/2006/relationships">
+  <p:cSld>
+    <p:spTree>
+      <p:nvGrpSpPr>
+        <p:cNvPr id="1" name=""/>
+        <p:cNvGrpSpPr/>
+        <p:nvPr/>
+      </p:nvGrpSpPr>
+      <p:grpSpPr/>
+      <p:sp>
+        <p:nvSpPr>
+          <p:cNvPr id="2" name="Title 1"/>
+          <p:cNvSpPr>
+            <a:spLocks noGrp="1"/>
+          </p:cNvSpPr>
+          <p:nvPr>
+            <p:ph type="title"/>
+          </p:nvPr>
+        </p:nvSpPr>
+        <p:spPr/>
+        <p:txBody>
+          <a:bodyPr/>
+          <a:lstStyle/>
+          <a:p>
+            <a:r>
+              <a:t>Privacy Concerns: Data Collection and Storage</a:t>
+            </a:r>
+          </a:p>
+        </p:txBody>
+      </p:sp>
+      <p:sp>
+        <p:nvSpPr>
+          <p:cNvPr id="3" name="Content Placeholder 2"/>
+          <p:cNvSpPr>
+            <a:spLocks noGrp="1"/>
+          </p:cNvSpPr>
+          <p:nvPr>
+            <p:ph idx="1"/>
+          </p:nvPr>
+        </p:nvSpPr>
+        <p:spPr/>
+        <p:txBody>
+          <a:bodyPr/>
+          <a:lstStyle/>
+          <a:p>
+            <a:r>
+              <a:t>Informed consent is paramount: individuals must clearly understand what data is being collected, how it will be used, and their rights regarding that data.</a:t>
+            </a:r>
+          </a:p>
+          <a:p>
+            <a:r>
+              <a:t>Data minimization principle: AI systems should only collect and retain the minimum amount of personal data necessary for their stated purpose.</a:t>
+            </a:r>
+          </a:p>
+          <a:p>
+            <a:r>
+              <a:t>Secure data storage is essential to prevent unauthorized access, breaches, and data exfiltration, employing robust encryption and access controls.</a:t>
+            </a:r>
+          </a:p>
+          <a:p>
+            <a:r>
+              <a:t>Data retention policies dictate how long personal data can be stored, ensuring it is deleted when no longer necessary or legally required.</a:t>
+            </a:r>
+          </a:p>
+          <a:p>
+            <a:r>
+              <a:t>The increasing prevalence of connected devices (IoT) and pervasive sensing expands the scope of data collection, amplifying privacy risks.</a:t>
+            </a:r>
+          </a:p>
+        </p:txBody>
+      </p:sp>
+    </p:spTree>
+  </p:cSld>
+  <p:clrMapOvr>
+    <a:masterClrMapping/>
+  </p:clrMapOvr>
+</p:sld>
+</file>
+
+<file path=ppt/slides/slide39.xml><?xml version="1.0" encoding="utf-8"?>
+<p:sld xmlns:a="http://schemas.openxmlformats.org/drawingml/2006/main" xmlns:p="http://schemas.openxmlformats.org/presentationml/2006/main" xmlns:r="http://schemas.openxmlformats.org/officeDocument/2006/relationships">
+  <p:cSld>
+    <p:spTree>
+      <p:nvGrpSpPr>
+        <p:cNvPr id="1" name=""/>
+        <p:cNvGrpSpPr/>
+        <p:nvPr/>
+      </p:nvGrpSpPr>
+      <p:grpSpPr/>
+      <p:sp>
+        <p:nvSpPr>
+          <p:cNvPr id="2" name="Title 1"/>
+          <p:cNvSpPr>
+            <a:spLocks noGrp="1"/>
+          </p:cNvSpPr>
+          <p:nvPr>
+            <p:ph type="title"/>
+          </p:nvPr>
+        </p:nvSpPr>
+        <p:spPr/>
+        <p:txBody>
+          <a:bodyPr/>
+          <a:lstStyle/>
+          <a:p>
+            <a:r>
+              <a:t>Privacy Concerns: Anonymization and De-identification</a:t>
+            </a:r>
+          </a:p>
+        </p:txBody>
+      </p:sp>
+      <p:sp>
+        <p:nvSpPr>
+          <p:cNvPr id="3" name="Content Placeholder 2"/>
+          <p:cNvSpPr>
+            <a:spLocks noGrp="1"/>
+          </p:cNvSpPr>
+          <p:nvPr>
+            <p:ph idx="1"/>
+          </p:nvPr>
+        </p:nvSpPr>
+        <p:spPr/>
+        <p:txBody>
+          <a:bodyPr/>
+          <a:lstStyle/>
+          <a:p>
+            <a:r>
+              <a:t>Anonymization aims to irreversibly remove or encrypt personal identifiers from data so that individuals cannot be linked to it.</a:t>
+            </a:r>
+          </a:p>
+          <a:p>
+            <a:r>
+              <a:t>Pseudonymization replaces direct identifiers with artificial identifiers, making it difficult but not impossible to re-identify individuals.</a:t>
+            </a:r>
+          </a:p>
+          <a:p>
+            <a:r>
+              <a:t>K-anonymity ensures that each record in a dataset is indistinguishable from at least K-1 other records based on quasi-identifiers, preventing linking attacks.</a:t>
+            </a:r>
+          </a:p>
+          <a:p>
+            <a:r>
+              <a:t>L-diversity extends k-anonymity by requiring diversity in sensitive attributes within each k-anonymous group, protecting against attribute disclosure.</a:t>
+            </a:r>
+          </a:p>
+          <a:p>
+            <a:r>
+              <a:t>Differential Privacy adds random noise to data or queries to protect individual records, guaranteeing that the presence or absence of any single data point does not significantly affect the output.</a:t>
             </a:r>
           </a:p>
         </p:txBody>
@@ -5598,7 +5794,7 @@
           <a:lstStyle/>
           <a:p>
             <a:r>
-              <a:t>Sentiment Analysis: Challenges and Limitations</a:t>
+              <a:t>Introduction to NLP: Core Linguistic Tasks</a:t>
             </a:r>
           </a:p>
         </p:txBody>
@@ -5619,32 +5815,827 @@
           <a:lstStyle/>
           <a:p>
             <a:r>
-              <a:t>Contextual understanding poses a significant challenge, as the sentiment of a word or phrase can change dramatically based on its surrounding text.</a:t>
-            </a:r>
-          </a:p>
-          <a:p>
-            <a:r>
-              <a:t>Sarcasm and irony detection remains difficult, as these expressions often convey a sentiment opposite to their literal meaning.</a:t>
-            </a:r>
-          </a:p>
-          <a:p>
-            <a:r>
-              <a:t>Negation handling requires sophisticated linguistic rules to accurately reverse the sentiment of a phrase (e.g., 'not good' vs. 'good').</a:t>
-            </a:r>
-          </a:p>
-          <a:p>
-            <a:r>
-              <a:t>Domain specificity means models trained on one domain (e.g., movie reviews) may perform poorly on another (e.g., medical texts) due to differing lexicons and contexts.</a:t>
-            </a:r>
-          </a:p>
-          <a:p>
-            <a:r>
-              <a:t>Subjectivity detection is complex, distinguishing factual statements from opinionated ones, which are the true target of sentiment analysis.</a:t>
-            </a:r>
-          </a:p>
-          <a:p>
-            <a:r>
-              <a:t>Multilingual sentiment analysis introduces complexities related to language nuances, cultural differences, and resource availability for less common languages.</a:t>
+              <a:t>Syntactic analysis involves parsing sentences to determine their grammatical structure, including part-of-speech tagging and dependency parsing.</a:t>
+            </a:r>
+          </a:p>
+          <a:p>
+            <a:r>
+              <a:t>Semantic analysis aims to understand the meaning of words, phrases, and sentences, encompassing word sense disambiguation and named entity recognition.</a:t>
+            </a:r>
+          </a:p>
+          <a:p>
+            <a:r>
+              <a:t>Pragmatic analysis focuses on understanding language in context, considering speaker intent and implied meanings.</a:t>
+            </a:r>
+          </a:p>
+          <a:p>
+            <a:r>
+              <a:t>Discourse analysis examines how sentences combine to form coherent texts and how meaning is constructed across longer stretches of language.</a:t>
+            </a:r>
+          </a:p>
+          <a:p>
+            <a:r>
+              <a:t>Core tasks also include morphological analysis (breaking words into morphemes) and phonological analysis (sound patterns).</a:t>
+            </a:r>
+          </a:p>
+        </p:txBody>
+      </p:sp>
+    </p:spTree>
+  </p:cSld>
+  <p:clrMapOvr>
+    <a:masterClrMapping/>
+  </p:clrMapOvr>
+</p:sld>
+</file>
+
+<file path=ppt/slides/slide40.xml><?xml version="1.0" encoding="utf-8"?>
+<p:sld xmlns:a="http://schemas.openxmlformats.org/drawingml/2006/main" xmlns:p="http://schemas.openxmlformats.org/presentationml/2006/main" xmlns:r="http://schemas.openxmlformats.org/officeDocument/2006/relationships">
+  <p:cSld>
+    <p:spTree>
+      <p:nvGrpSpPr>
+        <p:cNvPr id="1" name=""/>
+        <p:cNvGrpSpPr/>
+        <p:nvPr/>
+      </p:nvGrpSpPr>
+      <p:grpSpPr/>
+      <p:sp>
+        <p:nvSpPr>
+          <p:cNvPr id="2" name="Title 1"/>
+          <p:cNvSpPr>
+            <a:spLocks noGrp="1"/>
+          </p:cNvSpPr>
+          <p:nvPr>
+            <p:ph type="title"/>
+          </p:nvPr>
+        </p:nvSpPr>
+        <p:spPr/>
+        <p:txBody>
+          <a:bodyPr/>
+          <a:lstStyle/>
+          <a:p>
+            <a:r>
+              <a:t>Privacy Concerns: Privacy-Preserving AI Techniques</a:t>
+            </a:r>
+          </a:p>
+        </p:txBody>
+      </p:sp>
+      <p:sp>
+        <p:nvSpPr>
+          <p:cNvPr id="3" name="Content Placeholder 2"/>
+          <p:cNvSpPr>
+            <a:spLocks noGrp="1"/>
+          </p:cNvSpPr>
+          <p:nvPr>
+            <p:ph idx="1"/>
+          </p:nvPr>
+        </p:nvSpPr>
+        <p:spPr/>
+        <p:txBody>
+          <a:bodyPr/>
+          <a:lstStyle/>
+          <a:p>
+            <a:r>
+              <a:t>Federated Learning allows AI models to be trained on decentralized datasets (e.g., on individual devices) without raw data ever leaving the source, protecting privacy.</a:t>
+            </a:r>
+          </a:p>
+          <a:p>
+            <a:r>
+              <a:t>Homomorphic Encryption enables computations to be performed directly on encrypted data, yielding an encrypted result that, when decrypted, matches the result of the same computation on plaintext data.</a:t>
+            </a:r>
+          </a:p>
+          <a:p>
+            <a:r>
+              <a:t>Secure Multi-Party Computation (SMC) allows multiple parties to jointly compute a function over their inputs while keeping those inputs private.</a:t>
+            </a:r>
+          </a:p>
+          <a:p>
+            <a:r>
+              <a:t>Trusted Execution Environments (TEEs) provide hardware-level isolation for data and computation, creating a secure enclave where AI models can process sensitive information.</a:t>
+            </a:r>
+          </a:p>
+          <a:p>
+            <a:r>
+              <a:t>Synthetic Data Generation creates artificial data that statistically mimics real data but contains no actual personal information, suitable for model training and testing.</a:t>
+            </a:r>
+          </a:p>
+        </p:txBody>
+      </p:sp>
+    </p:spTree>
+  </p:cSld>
+  <p:clrMapOvr>
+    <a:masterClrMapping/>
+  </p:clrMapOvr>
+</p:sld>
+</file>
+
+<file path=ppt/slides/slide41.xml><?xml version="1.0" encoding="utf-8"?>
+<p:sld xmlns:a="http://schemas.openxmlformats.org/drawingml/2006/main" xmlns:p="http://schemas.openxmlformats.org/presentationml/2006/main" xmlns:r="http://schemas.openxmlformats.org/officeDocument/2006/relationships">
+  <p:cSld>
+    <p:spTree>
+      <p:nvGrpSpPr>
+        <p:cNvPr id="1" name=""/>
+        <p:cNvGrpSpPr/>
+        <p:nvPr/>
+      </p:nvGrpSpPr>
+      <p:grpSpPr/>
+      <p:sp>
+        <p:nvSpPr>
+          <p:cNvPr id="2" name="Title 1"/>
+          <p:cNvSpPr>
+            <a:spLocks noGrp="1"/>
+          </p:cNvSpPr>
+          <p:nvPr>
+            <p:ph type="title"/>
+          </p:nvPr>
+        </p:nvSpPr>
+        <p:spPr/>
+        <p:txBody>
+          <a:bodyPr/>
+          <a:lstStyle/>
+          <a:p>
+            <a:r>
+              <a:t>Privacy Concerns: Regulatory Frameworks and Compliance</a:t>
+            </a:r>
+          </a:p>
+        </p:txBody>
+      </p:sp>
+      <p:sp>
+        <p:nvSpPr>
+          <p:cNvPr id="3" name="Content Placeholder 2"/>
+          <p:cNvSpPr>
+            <a:spLocks noGrp="1"/>
+          </p:cNvSpPr>
+          <p:nvPr>
+            <p:ph idx="1"/>
+          </p:nvPr>
+        </p:nvSpPr>
+        <p:spPr/>
+        <p:txBody>
+          <a:bodyPr/>
+          <a:lstStyle/>
+          <a:p>
+            <a:r>
+              <a:t>General Data Protection Regulation (GDPR) in the EU sets strict rules for data protection and privacy, granting individuals significant control over their personal data.</a:t>
+            </a:r>
+          </a:p>
+          <a:p>
+            <a:r>
+              <a:t>California Consumer Privacy Act (CCPA) and its successor CPRA provide California residents with rights similar to GDPR concerning their personal information.</a:t>
+            </a:r>
+          </a:p>
+          <a:p>
+            <a:r>
+              <a:t>Personal Information Protection Law (PIPL) in China similarly imposes stringent requirements on data processing, storage, and cross-border transfer.</a:t>
+            </a:r>
+          </a:p>
+          <a:p>
+            <a:r>
+              <a:t>These regulations mandate transparent data practices, require explicit consent, enforce data breach notifications, and stipulate severe penalties for non-compliance.</a:t>
+            </a:r>
+          </a:p>
+          <a:p>
+            <a:r>
+              <a:t>Compliance with these evolving legal frameworks is crucial for organizations developing and deploying AI systems, often requiring privacy-by-design principles.</a:t>
+            </a:r>
+          </a:p>
+        </p:txBody>
+      </p:sp>
+    </p:spTree>
+  </p:cSld>
+  <p:clrMapOvr>
+    <a:masterClrMapping/>
+  </p:clrMapOvr>
+</p:sld>
+</file>
+
+<file path=ppt/slides/slide42.xml><?xml version="1.0" encoding="utf-8"?>
+<p:sld xmlns:a="http://schemas.openxmlformats.org/drawingml/2006/main" xmlns:p="http://schemas.openxmlformats.org/presentationml/2006/main" xmlns:r="http://schemas.openxmlformats.org/officeDocument/2006/relationships">
+  <p:cSld>
+    <p:spTree>
+      <p:nvGrpSpPr>
+        <p:cNvPr id="1" name=""/>
+        <p:cNvGrpSpPr/>
+        <p:nvPr/>
+      </p:nvGrpSpPr>
+      <p:grpSpPr/>
+      <p:sp>
+        <p:nvSpPr>
+          <p:cNvPr id="2" name="Title 1"/>
+          <p:cNvSpPr>
+            <a:spLocks noGrp="1"/>
+          </p:cNvSpPr>
+          <p:nvPr>
+            <p:ph type="title"/>
+          </p:nvPr>
+        </p:nvSpPr>
+        <p:spPr/>
+        <p:txBody>
+          <a:bodyPr/>
+          <a:lstStyle/>
+          <a:p>
+            <a:r>
+              <a:t>Explainable AI (XAI): Unveiling the Black Box</a:t>
+            </a:r>
+          </a:p>
+        </p:txBody>
+      </p:sp>
+      <p:sp>
+        <p:nvSpPr>
+          <p:cNvPr id="3" name="Content Placeholder 2"/>
+          <p:cNvSpPr>
+            <a:spLocks noGrp="1"/>
+          </p:cNvSpPr>
+          <p:nvPr>
+            <p:ph idx="1"/>
+          </p:nvPr>
+        </p:nvSpPr>
+        <p:spPr/>
+        <p:txBody>
+          <a:bodyPr/>
+          <a:lstStyle/>
+          <a:p>
+            <a:r>
+              <a:t>Explainable AI (XAI) is a field of AI research focused on developing methods and techniques that allow humans to understand the output of AI models.</a:t>
+            </a:r>
+          </a:p>
+          <a:p>
+            <a:r>
+              <a:t>The 'black box' problem refers to the opaque nature of complex AI models (especially deep neural networks), where their decision-making process is not readily interpretable.</a:t>
+            </a:r>
+          </a:p>
+          <a:p>
+            <a:r>
+              <a:t>XAI addresses the growing need for transparency, trust, and accountability in AI systems, particularly in high-stakes domains like healthcare, finance, and criminal justice.</a:t>
+            </a:r>
+          </a:p>
+          <a:p>
+            <a:r>
+              <a:t>Understanding model decisions is crucial for debugging, identifying biases, ensuring fairness, and complying with regulatory requirements.</a:t>
+            </a:r>
+          </a:p>
+          <a:p>
+            <a:r>
+              <a:t>It aims to provide insights into *why* an AI system made a particular prediction or decision, not just *what* the prediction was.</a:t>
+            </a:r>
+          </a:p>
+        </p:txBody>
+      </p:sp>
+    </p:spTree>
+  </p:cSld>
+  <p:clrMapOvr>
+    <a:masterClrMapping/>
+  </p:clrMapOvr>
+</p:sld>
+</file>
+
+<file path=ppt/slides/slide43.xml><?xml version="1.0" encoding="utf-8"?>
+<p:sld xmlns:a="http://schemas.openxmlformats.org/drawingml/2006/main" xmlns:p="http://schemas.openxmlformats.org/presentationml/2006/main" xmlns:r="http://schemas.openxmlformats.org/officeDocument/2006/relationships">
+  <p:cSld>
+    <p:spTree>
+      <p:nvGrpSpPr>
+        <p:cNvPr id="1" name=""/>
+        <p:cNvGrpSpPr/>
+        <p:nvPr/>
+      </p:nvGrpSpPr>
+      <p:grpSpPr/>
+      <p:sp>
+        <p:nvSpPr>
+          <p:cNvPr id="2" name="Title 1"/>
+          <p:cNvSpPr>
+            <a:spLocks noGrp="1"/>
+          </p:cNvSpPr>
+          <p:nvPr>
+            <p:ph type="title"/>
+          </p:nvPr>
+        </p:nvSpPr>
+        <p:spPr/>
+        <p:txBody>
+          <a:bodyPr/>
+          <a:lstStyle/>
+          <a:p>
+            <a:r>
+              <a:t>Explainable AI (XAI): Dimensions of Explainability</a:t>
+            </a:r>
+          </a:p>
+        </p:txBody>
+      </p:sp>
+      <p:sp>
+        <p:nvSpPr>
+          <p:cNvPr id="3" name="Content Placeholder 2"/>
+          <p:cNvSpPr>
+            <a:spLocks noGrp="1"/>
+          </p:cNvSpPr>
+          <p:nvPr>
+            <p:ph idx="1"/>
+          </p:nvPr>
+        </p:nvSpPr>
+        <p:spPr/>
+        <p:txBody>
+          <a:bodyPr/>
+          <a:lstStyle/>
+          <a:p>
+            <a:r>
+              <a:t>Transparency: Refers to how easily one can understand the internal workings of a model (e.g., rule-based systems are transparent, deep networks are not).</a:t>
+            </a:r>
+          </a:p>
+          <a:p>
+            <a:r>
+              <a:t>Interpretability: The degree to which a human can understand the cause and effect of a model's behavior, allowing them to comprehend the relationship between input and output.</a:t>
+            </a:r>
+          </a:p>
+          <a:p>
+            <a:r>
+              <a:t>Fidelity: How accurately the explanation reflects the underlying model's behavior, ensuring the explanation is not misleading.</a:t>
+            </a:r>
+          </a:p>
+          <a:p>
+            <a:r>
+              <a:t>Comprehensibility: How easily a human can understand the explanation provided, tailored to the target audience (e.g., domain expert vs. layperson).</a:t>
+            </a:r>
+          </a:p>
+          <a:p>
+            <a:r>
+              <a:t>Trustworthiness: The degree to which users can rely on the model's decisions and the explanations provided.</a:t>
+            </a:r>
+          </a:p>
+        </p:txBody>
+      </p:sp>
+    </p:spTree>
+  </p:cSld>
+  <p:clrMapOvr>
+    <a:masterClrMapping/>
+  </p:clrMapOvr>
+</p:sld>
+</file>
+
+<file path=ppt/slides/slide44.xml><?xml version="1.0" encoding="utf-8"?>
+<p:sld xmlns:a="http://schemas.openxmlformats.org/drawingml/2006/main" xmlns:p="http://schemas.openxmlformats.org/presentationml/2006/main" xmlns:r="http://schemas.openxmlformats.org/officeDocument/2006/relationships">
+  <p:cSld>
+    <p:spTree>
+      <p:nvGrpSpPr>
+        <p:cNvPr id="1" name=""/>
+        <p:cNvGrpSpPr/>
+        <p:nvPr/>
+      </p:nvGrpSpPr>
+      <p:grpSpPr/>
+      <p:sp>
+        <p:nvSpPr>
+          <p:cNvPr id="2" name="Title 1"/>
+          <p:cNvSpPr>
+            <a:spLocks noGrp="1"/>
+          </p:cNvSpPr>
+          <p:nvPr>
+            <p:ph type="title"/>
+          </p:nvPr>
+        </p:nvSpPr>
+        <p:spPr/>
+        <p:txBody>
+          <a:bodyPr/>
+          <a:lstStyle/>
+          <a:p>
+            <a:r>
+              <a:t>Explainable AI (XAI): Post-hoc Explainability Techniques</a:t>
+            </a:r>
+          </a:p>
+        </p:txBody>
+      </p:sp>
+      <p:sp>
+        <p:nvSpPr>
+          <p:cNvPr id="3" name="Content Placeholder 2"/>
+          <p:cNvSpPr>
+            <a:spLocks noGrp="1"/>
+          </p:cNvSpPr>
+          <p:nvPr>
+            <p:ph idx="1"/>
+          </p:nvPr>
+        </p:nvSpPr>
+        <p:spPr/>
+        <p:txBody>
+          <a:bodyPr/>
+          <a:lstStyle/>
+          <a:p>
+            <a:r>
+              <a:t>Post-hoc explanations are generated *after* a model has been trained, attempting to shed light on its predictions without altering its internal structure.</a:t>
+            </a:r>
+          </a:p>
+          <a:p>
+            <a:r>
+              <a:t>LIME (Local Interpretable Model-agnostic Explanations) explains individual predictions by training a simple, interpretable model locally around the prediction point.</a:t>
+            </a:r>
+          </a:p>
+          <a:p>
+            <a:r>
+              <a:t>SHAP (SHapley Additive exPlanations) uses concepts from cooperative game theory to assign an importance value (Shapley value) to each feature for a given prediction.</a:t>
+            </a:r>
+          </a:p>
+          <a:p>
+            <a:r>
+              <a:t>Partial Dependence Plots (PDPs) show the marginal effect of one or two features on the predicted outcome of a black-box model.</a:t>
+            </a:r>
+          </a:p>
+          <a:p>
+            <a:r>
+              <a:t>Permutation Feature Importance assesses the importance of a feature by measuring how much the model's performance decreases when that feature's values are randomly shuffled.</a:t>
+            </a:r>
+          </a:p>
+        </p:txBody>
+      </p:sp>
+    </p:spTree>
+  </p:cSld>
+  <p:clrMapOvr>
+    <a:masterClrMapping/>
+  </p:clrMapOvr>
+</p:sld>
+</file>
+
+<file path=ppt/slides/slide45.xml><?xml version="1.0" encoding="utf-8"?>
+<p:sld xmlns:a="http://schemas.openxmlformats.org/drawingml/2006/main" xmlns:p="http://schemas.openxmlformats.org/presentationml/2006/main" xmlns:r="http://schemas.openxmlformats.org/officeDocument/2006/relationships">
+  <p:cSld>
+    <p:spTree>
+      <p:nvGrpSpPr>
+        <p:cNvPr id="1" name=""/>
+        <p:cNvGrpSpPr/>
+        <p:nvPr/>
+      </p:nvGrpSpPr>
+      <p:grpSpPr/>
+      <p:sp>
+        <p:nvSpPr>
+          <p:cNvPr id="2" name="Title 1"/>
+          <p:cNvSpPr>
+            <a:spLocks noGrp="1"/>
+          </p:cNvSpPr>
+          <p:nvPr>
+            <p:ph type="title"/>
+          </p:nvPr>
+        </p:nvSpPr>
+        <p:spPr/>
+        <p:txBody>
+          <a:bodyPr/>
+          <a:lstStyle/>
+          <a:p>
+            <a:r>
+              <a:t>Explainable AI (XAI): Inherently Interpretable Models</a:t>
+            </a:r>
+          </a:p>
+        </p:txBody>
+      </p:sp>
+      <p:sp>
+        <p:nvSpPr>
+          <p:cNvPr id="3" name="Content Placeholder 2"/>
+          <p:cNvSpPr>
+            <a:spLocks noGrp="1"/>
+          </p:cNvSpPr>
+          <p:nvPr>
+            <p:ph idx="1"/>
+          </p:nvPr>
+        </p:nvSpPr>
+        <p:spPr/>
+        <p:txBody>
+          <a:bodyPr/>
+          <a:lstStyle/>
+          <a:p>
+            <a:r>
+              <a:t>Inherently interpretable models are designed from the ground up to be understandable, where their internal logic is transparent to humans.</a:t>
+            </a:r>
+          </a:p>
+          <a:p>
+            <a:r>
+              <a:t>Linear Regression and Logistic Regression models provide coefficient weights for each feature, directly indicating their impact on the outcome.</a:t>
+            </a:r>
+          </a:p>
+          <a:p>
+            <a:r>
+              <a:t>Decision Trees and Rule-based Systems offer clear, tree-like structures or sets of IF-THEN rules that are easy for humans to follow and comprehend.</a:t>
+            </a:r>
+          </a:p>
+          <a:p>
+            <a:r>
+              <a:t>Generalized Additive Models (GAMs) allow for modeling non-linear relationships while maintaining interpretability by showing the individual contribution of each feature.</a:t>
+            </a:r>
+          </a:p>
+          <a:p>
+            <a:r>
+              <a:t>These models often involve a trade-off between interpretability and predictive power, as complex relationships may not be captured as effectively as by deep learning models.</a:t>
+            </a:r>
+          </a:p>
+        </p:txBody>
+      </p:sp>
+    </p:spTree>
+  </p:cSld>
+  <p:clrMapOvr>
+    <a:masterClrMapping/>
+  </p:clrMapOvr>
+</p:sld>
+</file>
+
+<file path=ppt/slides/slide46.xml><?xml version="1.0" encoding="utf-8"?>
+<p:sld xmlns:a="http://schemas.openxmlformats.org/drawingml/2006/main" xmlns:p="http://schemas.openxmlformats.org/presentationml/2006/main" xmlns:r="http://schemas.openxmlformats.org/officeDocument/2006/relationships">
+  <p:cSld>
+    <p:spTree>
+      <p:nvGrpSpPr>
+        <p:cNvPr id="1" name=""/>
+        <p:cNvGrpSpPr/>
+        <p:nvPr/>
+      </p:nvGrpSpPr>
+      <p:grpSpPr/>
+      <p:sp>
+        <p:nvSpPr>
+          <p:cNvPr id="2" name="Title 1"/>
+          <p:cNvSpPr>
+            <a:spLocks noGrp="1"/>
+          </p:cNvSpPr>
+          <p:nvPr>
+            <p:ph type="title"/>
+          </p:nvPr>
+        </p:nvSpPr>
+        <p:spPr/>
+        <p:txBody>
+          <a:bodyPr/>
+          <a:lstStyle/>
+          <a:p>
+            <a:r>
+              <a:t>Explainable AI (XAI): Challenges and Future Directions</a:t>
+            </a:r>
+          </a:p>
+        </p:txBody>
+      </p:sp>
+      <p:sp>
+        <p:nvSpPr>
+          <p:cNvPr id="3" name="Content Placeholder 2"/>
+          <p:cNvSpPr>
+            <a:spLocks noGrp="1"/>
+          </p:cNvSpPr>
+          <p:nvPr>
+            <p:ph idx="1"/>
+          </p:nvPr>
+        </p:nvSpPr>
+        <p:spPr/>
+        <p:txBody>
+          <a:bodyPr/>
+          <a:lstStyle/>
+          <a:p>
+            <a:r>
+              <a:t>Evaluating the quality of explanations is a significant challenge; metrics are often subjective and context-dependent, requiring human evaluation.</a:t>
+            </a:r>
+          </a:p>
+          <a:p>
+            <a:r>
+              <a:t>The trade-off between explainability and model performance often means that highly accurate complex models are less interpretable.</a:t>
+            </a:r>
+          </a:p>
+          <a:p>
+            <a:r>
+              <a:t>Ensuring explanations are actionable and useful for different stakeholders (developers, regulators, end-users) requires tailored approaches.</a:t>
+            </a:r>
+          </a:p>
+          <a:p>
+            <a:r>
+              <a:t>Human-Computer Interaction (HCI) research is crucial for designing effective interfaces that present explanations in an understandable and trustworthy manner.</a:t>
+            </a:r>
+          </a:p>
+          <a:p>
+            <a:r>
+              <a:t>Future research focuses on developing more robust and consistent XAI methods, integrating explainability directly into model design, and creating personalized explanations.</a:t>
+            </a:r>
+          </a:p>
+        </p:txBody>
+      </p:sp>
+    </p:spTree>
+  </p:cSld>
+  <p:clrMapOvr>
+    <a:masterClrMapping/>
+  </p:clrMapOvr>
+</p:sld>
+</file>
+
+<file path=ppt/slides/slide47.xml><?xml version="1.0" encoding="utf-8"?>
+<p:sld xmlns:a="http://schemas.openxmlformats.org/drawingml/2006/main" xmlns:p="http://schemas.openxmlformats.org/presentationml/2006/main" xmlns:r="http://schemas.openxmlformats.org/officeDocument/2006/relationships">
+  <p:cSld>
+    <p:spTree>
+      <p:nvGrpSpPr>
+        <p:cNvPr id="1" name=""/>
+        <p:cNvGrpSpPr/>
+        <p:nvPr/>
+      </p:nvGrpSpPr>
+      <p:grpSpPr/>
+      <p:sp>
+        <p:nvSpPr>
+          <p:cNvPr id="2" name="Title 1"/>
+          <p:cNvSpPr>
+            <a:spLocks noGrp="1"/>
+          </p:cNvSpPr>
+          <p:nvPr>
+            <p:ph type="title"/>
+          </p:nvPr>
+        </p:nvSpPr>
+        <p:spPr/>
+        <p:txBody>
+          <a:bodyPr/>
+          <a:lstStyle/>
+          <a:p>
+            <a:r>
+              <a:t>Future of AI: Emerging Trends</a:t>
+            </a:r>
+          </a:p>
+        </p:txBody>
+      </p:sp>
+      <p:sp>
+        <p:nvSpPr>
+          <p:cNvPr id="3" name="Content Placeholder 2"/>
+          <p:cNvSpPr>
+            <a:spLocks noGrp="1"/>
+          </p:cNvSpPr>
+          <p:nvPr>
+            <p:ph idx="1"/>
+          </p:nvPr>
+        </p:nvSpPr>
+        <p:spPr/>
+        <p:txBody>
+          <a:bodyPr/>
+          <a:lstStyle/>
+          <a:p>
+            <a:r>
+              <a:t>Multimodal AI is an emerging trend that processes and integrates information from multiple modalities, such as text, images, audio, and video, for a richer understanding.</a:t>
+            </a:r>
+          </a:p>
+          <a:p>
+            <a:r>
+              <a:t>Foundation Models (e.g., large language models) are becoming a central paradigm, pre-trained on vast datasets and adaptable to a wide range of downstream tasks.</a:t>
+            </a:r>
+          </a:p>
+          <a:p>
+            <a:r>
+              <a:t>Embodied AI focuses on creating intelligent agents that interact with and learn from the physical world through sensory perception and action.</a:t>
+            </a:r>
+          </a:p>
+          <a:p>
+            <a:r>
+              <a:t>AI for Science: AI is increasingly being used to accelerate scientific discovery in fields like material science, drug discovery, and climate modeling.</a:t>
+            </a:r>
+          </a:p>
+          <a:p>
+            <a:r>
+              <a:t>Edge AI deployment allows AI models to run directly on local devices, improving privacy, reducing latency, and enabling offline functionality.</a:t>
+            </a:r>
+          </a:p>
+        </p:txBody>
+      </p:sp>
+    </p:spTree>
+  </p:cSld>
+  <p:clrMapOvr>
+    <a:masterClrMapping/>
+  </p:clrMapOvr>
+</p:sld>
+</file>
+
+<file path=ppt/slides/slide48.xml><?xml version="1.0" encoding="utf-8"?>
+<p:sld xmlns:a="http://schemas.openxmlformats.org/drawingml/2006/main" xmlns:p="http://schemas.openxmlformats.org/presentationml/2006/main" xmlns:r="http://schemas.openxmlformats.org/officeDocument/2006/relationships">
+  <p:cSld>
+    <p:spTree>
+      <p:nvGrpSpPr>
+        <p:cNvPr id="1" name=""/>
+        <p:cNvGrpSpPr/>
+        <p:nvPr/>
+      </p:nvGrpSpPr>
+      <p:grpSpPr/>
+      <p:sp>
+        <p:nvSpPr>
+          <p:cNvPr id="2" name="Title 1"/>
+          <p:cNvSpPr>
+            <a:spLocks noGrp="1"/>
+          </p:cNvSpPr>
+          <p:nvPr>
+            <p:ph type="title"/>
+          </p:nvPr>
+        </p:nvSpPr>
+        <p:spPr/>
+        <p:txBody>
+          <a:bodyPr/>
+          <a:lstStyle/>
+          <a:p>
+            <a:r>
+              <a:t>Future of AI: Advanced Capabilities and AGI</a:t>
+            </a:r>
+          </a:p>
+        </p:txBody>
+      </p:sp>
+      <p:sp>
+        <p:nvSpPr>
+          <p:cNvPr id="3" name="Content Placeholder 2"/>
+          <p:cNvSpPr>
+            <a:spLocks noGrp="1"/>
+          </p:cNvSpPr>
+          <p:nvPr>
+            <p:ph idx="1"/>
+          </p:nvPr>
+        </p:nvSpPr>
+        <p:spPr/>
+        <p:txBody>
+          <a:bodyPr/>
+          <a:lstStyle/>
+          <a:p>
+            <a:r>
+              <a:t>The distinction between Narrow AI (task-specific intelligence) and Artificial General Intelligence (AGI), capable of human-like intelligence across diverse tasks, remains a key discussion.</a:t>
+            </a:r>
+          </a:p>
+          <a:p>
+            <a:r>
+              <a:t>Research is advancing towards more generalizable AI, with LLMs showing emergent capabilities previously thought to require AGI.</a:t>
+            </a:r>
+          </a:p>
+          <a:p>
+            <a:r>
+              <a:t>Emergent behaviors refer to capabilities that are not explicitly programmed or obvious from a model's design but arise from scale and complexity.</a:t>
+            </a:r>
+          </a:p>
+          <a:p>
+            <a:r>
+              <a:t>The concept of Superintelligence, an intellect significantly smarter than the best human brains in virtually every field, poses profound questions about humanity's future.</a:t>
+            </a:r>
+          </a:p>
+          <a:p>
+            <a:r>
+              <a:t>Ongoing efforts aim to develop AI that can perform complex reasoning, possess common sense, and learn continuously from dynamic environments.</a:t>
+            </a:r>
+          </a:p>
+        </p:txBody>
+      </p:sp>
+    </p:spTree>
+  </p:cSld>
+  <p:clrMapOvr>
+    <a:masterClrMapping/>
+  </p:clrMapOvr>
+</p:sld>
+</file>
+
+<file path=ppt/slides/slide49.xml><?xml version="1.0" encoding="utf-8"?>
+<p:sld xmlns:a="http://schemas.openxmlformats.org/drawingml/2006/main" xmlns:p="http://schemas.openxmlformats.org/presentationml/2006/main" xmlns:r="http://schemas.openxmlformats.org/officeDocument/2006/relationships">
+  <p:cSld>
+    <p:spTree>
+      <p:nvGrpSpPr>
+        <p:cNvPr id="1" name=""/>
+        <p:cNvGrpSpPr/>
+        <p:nvPr/>
+      </p:nvGrpSpPr>
+      <p:grpSpPr/>
+      <p:sp>
+        <p:nvSpPr>
+          <p:cNvPr id="2" name="Title 1"/>
+          <p:cNvSpPr>
+            <a:spLocks noGrp="1"/>
+          </p:cNvSpPr>
+          <p:nvPr>
+            <p:ph type="title"/>
+          </p:nvPr>
+        </p:nvSpPr>
+        <p:spPr/>
+        <p:txBody>
+          <a:bodyPr/>
+          <a:lstStyle/>
+          <a:p>
+            <a:r>
+              <a:t>Future of AI: Societal Implications and Potential</a:t>
+            </a:r>
+          </a:p>
+        </p:txBody>
+      </p:sp>
+      <p:sp>
+        <p:nvSpPr>
+          <p:cNvPr id="3" name="Content Placeholder 2"/>
+          <p:cNvSpPr>
+            <a:spLocks noGrp="1"/>
+          </p:cNvSpPr>
+          <p:nvPr>
+            <p:ph idx="1"/>
+          </p:nvPr>
+        </p:nvSpPr>
+        <p:spPr/>
+        <p:txBody>
+          <a:bodyPr/>
+          <a:lstStyle/>
+          <a:p>
+            <a:r>
+              <a:t>Healthcare: AI promises revolutionary advancements in diagnostics, personalized medicine, drug discovery, and surgical assistance, extending human lifespan and improving quality of life.</a:t>
+            </a:r>
+          </a:p>
+          <a:p>
+            <a:r>
+              <a:t>Education: AI-powered adaptive learning platforms can personalize educational experiences, provide intelligent tutoring, and make learning more accessible.</a:t>
+            </a:r>
+          </a:p>
+          <a:p>
+            <a:r>
+              <a:t>Climate Change: AI can optimize energy grids, model climate patterns, develop sustainable materials, and manage natural resources more efficiently to combat environmental crises.</a:t>
+            </a:r>
+          </a:p>
+          <a:p>
+            <a:r>
+              <a:t>Creative Industries: AI is becoming a powerful tool for artists, musicians, and writers, assisting in content generation, design, and new forms of creative expression.</a:t>
+            </a:r>
+          </a:p>
+          <a:p>
+            <a:r>
+              <a:t>Economic Transformation: AI can boost productivity, drive innovation, and create new industries, but also demands thoughtful policy for workforce adaptation and equitable distribution of benefits.</a:t>
             </a:r>
           </a:p>
         </p:txBody>
@@ -5683,7 +6674,7 @@
           <a:lstStyle/>
           <a:p>
             <a:r>
-              <a:t>Sentiment Analysis: Advanced Concepts and Future Directions</a:t>
+              <a:t>Introduction to NLP: Key Applications</a:t>
             </a:r>
           </a:p>
         </p:txBody>
@@ -5704,32 +6695,187 @@
           <a:lstStyle/>
           <a:p>
             <a:r>
-              <a:t>Aspect-Based Sentiment Analysis (ABSA) focuses on identifying sentiments towards specific entities or attributes within a text, rather than the overall sentiment.</a:t>
-            </a:r>
-          </a:p>
-          <a:p>
-            <a:r>
-              <a:t>Fine-grained sentiment analysis expands beyond positive/negative/neutral to include more granular emotional states like joy, anger, sadness, and fear.</a:t>
-            </a:r>
-          </a:p>
-          <a:p>
-            <a:r>
-              <a:t>Multimodal sentiment analysis integrates data from various modalities, such as text, audio (intonation, tone), and visual cues (facial expressions, body language), for a richer understanding.</a:t>
-            </a:r>
-          </a:p>
-          <a:p>
-            <a:r>
-              <a:t>Emotion AI aims to move beyond basic sentiment to recognize and interpret a broader spectrum of human emotions, often utilizing psychological models.</a:t>
-            </a:r>
-          </a:p>
-          <a:p>
-            <a:r>
-              <a:t>Explainable Sentiment Analysis (XSA) seeks to provide insights into why a model made a particular sentiment prediction, enhancing trust and interpretability.</a:t>
-            </a:r>
-          </a:p>
-          <a:p>
-            <a:r>
-              <a:t>The integration of SA with large language models (LLMs) offers new avenues for highly nuanced and contextually aware sentiment detection.</a:t>
+              <a:t>Machine Translation (MT) systems automatically translate text or speech from one language to another, essential for global communication.</a:t>
+            </a:r>
+          </a:p>
+          <a:p>
+            <a:r>
+              <a:t>Information Retrieval (IR) and Question Answering (QA) systems help users find relevant documents or direct answers from vast data repositories.</a:t>
+            </a:r>
+          </a:p>
+          <a:p>
+            <a:r>
+              <a:t>Text Summarization condenses longer texts into shorter, coherent versions, crucial for information overload management.</a:t>
+            </a:r>
+          </a:p>
+          <a:p>
+            <a:r>
+              <a:t>Speech Recognition (SR) converts spoken language into text, enabling voice assistants and transcription services.</a:t>
+            </a:r>
+          </a:p>
+          <a:p>
+            <a:r>
+              <a:t>Sentiment Analysis determines the emotional tone or opinion expressed in a piece of text, vital for market research and customer feedback.</a:t>
+            </a:r>
+          </a:p>
+        </p:txBody>
+      </p:sp>
+    </p:spTree>
+  </p:cSld>
+  <p:clrMapOvr>
+    <a:masterClrMapping/>
+  </p:clrMapOvr>
+</p:sld>
+</file>
+
+<file path=ppt/slides/slide50.xml><?xml version="1.0" encoding="utf-8"?>
+<p:sld xmlns:a="http://schemas.openxmlformats.org/drawingml/2006/main" xmlns:p="http://schemas.openxmlformats.org/presentationml/2006/main" xmlns:r="http://schemas.openxmlformats.org/officeDocument/2006/relationships">
+  <p:cSld>
+    <p:spTree>
+      <p:nvGrpSpPr>
+        <p:cNvPr id="1" name=""/>
+        <p:cNvGrpSpPr/>
+        <p:nvPr/>
+      </p:nvGrpSpPr>
+      <p:grpSpPr/>
+      <p:sp>
+        <p:nvSpPr>
+          <p:cNvPr id="2" name="Title 1"/>
+          <p:cNvSpPr>
+            <a:spLocks noGrp="1"/>
+          </p:cNvSpPr>
+          <p:nvPr>
+            <p:ph type="title"/>
+          </p:nvPr>
+        </p:nvSpPr>
+        <p:spPr/>
+        <p:txBody>
+          <a:bodyPr/>
+          <a:lstStyle/>
+          <a:p>
+            <a:r>
+              <a:t>Future of AI: Risks and Challenges Ahead</a:t>
+            </a:r>
+          </a:p>
+        </p:txBody>
+      </p:sp>
+      <p:sp>
+        <p:nvSpPr>
+          <p:cNvPr id="3" name="Content Placeholder 2"/>
+          <p:cNvSpPr>
+            <a:spLocks noGrp="1"/>
+          </p:cNvSpPr>
+          <p:nvPr>
+            <p:ph idx="1"/>
+          </p:nvPr>
+        </p:nvSpPr>
+        <p:spPr/>
+        <p:txBody>
+          <a:bodyPr/>
+          <a:lstStyle/>
+          <a:p>
+            <a:r>
+              <a:t>The 'control problem' or AI alignment problem focuses on how to ensure highly intelligent AI systems operate in accordance with human values and intentions, preventing unintended harm.</a:t>
+            </a:r>
+          </a:p>
+          <a:p>
+            <a:r>
+              <a:t>Existential Risk: Concerns that misaligned or runaway superintelligence could pose an existential threat to humanity, as theorized by some researchers.</a:t>
+            </a:r>
+          </a:p>
+          <a:p>
+            <a:r>
+              <a:t>Weaponization of AI: The development of autonomous weapon systems raises profound ethical questions about moral responsibility and the future of warfare.</a:t>
+            </a:r>
+          </a:p>
+          <a:p>
+            <a:r>
+              <a:t>Economic Disruption: Further automation could lead to mass unemployment and widening wealth inequality if not managed with proactive social and economic policies.</a:t>
+            </a:r>
+          </a:p>
+          <a:p>
+            <a:r>
+              <a:t>Misinformation and Manipulation: Advanced generative AI can produce highly convincing fake content (deepfakes, fake news), posing threats to democracy and public trust.</a:t>
+            </a:r>
+          </a:p>
+        </p:txBody>
+      </p:sp>
+    </p:spTree>
+  </p:cSld>
+  <p:clrMapOvr>
+    <a:masterClrMapping/>
+  </p:clrMapOvr>
+</p:sld>
+</file>
+
+<file path=ppt/slides/slide51.xml><?xml version="1.0" encoding="utf-8"?>
+<p:sld xmlns:a="http://schemas.openxmlformats.org/drawingml/2006/main" xmlns:p="http://schemas.openxmlformats.org/presentationml/2006/main" xmlns:r="http://schemas.openxmlformats.org/officeDocument/2006/relationships">
+  <p:cSld>
+    <p:spTree>
+      <p:nvGrpSpPr>
+        <p:cNvPr id="1" name=""/>
+        <p:cNvGrpSpPr/>
+        <p:nvPr/>
+      </p:nvGrpSpPr>
+      <p:grpSpPr/>
+      <p:sp>
+        <p:nvSpPr>
+          <p:cNvPr id="2" name="Title 1"/>
+          <p:cNvSpPr>
+            <a:spLocks noGrp="1"/>
+          </p:cNvSpPr>
+          <p:nvPr>
+            <p:ph type="title"/>
+          </p:nvPr>
+        </p:nvSpPr>
+        <p:spPr/>
+        <p:txBody>
+          <a:bodyPr/>
+          <a:lstStyle/>
+          <a:p>
+            <a:r>
+              <a:t>Future of AI: Responsible Development and Governance</a:t>
+            </a:r>
+          </a:p>
+        </p:txBody>
+      </p:sp>
+      <p:sp>
+        <p:nvSpPr>
+          <p:cNvPr id="3" name="Content Placeholder 2"/>
+          <p:cNvSpPr>
+            <a:spLocks noGrp="1"/>
+          </p:cNvSpPr>
+          <p:nvPr>
+            <p:ph idx="1"/>
+          </p:nvPr>
+        </p:nvSpPr>
+        <p:spPr/>
+        <p:txBody>
+          <a:bodyPr/>
+          <a:lstStyle/>
+          <a:p>
+            <a:r>
+              <a:t>International cooperation and multi-stakeholder engagement are crucial for establishing global norms and standards for AI development and deployment.</a:t>
+            </a:r>
+          </a:p>
+          <a:p>
+            <a:r>
+              <a:t>Developing comprehensive ethical guidelines and regulatory frameworks (e.g., AI Acts) is essential to govern the responsible creation and use of AI technologies.</a:t>
+            </a:r>
+          </a:p>
+          <a:p>
+            <a:r>
+              <a:t>Investment in AI safety research, focusing on alignment, robustness, and interpretability, is critical to mitigate potential risks.</a:t>
+            </a:r>
+          </a:p>
+          <a:p>
+            <a:r>
+              <a:t>Promoting AI literacy and public education is vital to enable informed societal discourse and democratic participation in shaping AI's future.</a:t>
+            </a:r>
+          </a:p>
+          <a:p>
+            <a:r>
+              <a:t>Fostering diverse and inclusive AI development teams helps ensure that ethical considerations and societal impacts are broadly represented and addressed.</a:t>
             </a:r>
           </a:p>
         </p:txBody>
@@ -5768,7 +6914,7 @@
           <a:lstStyle/>
           <a:p>
             <a:r>
-              <a:t>Chatbots and Language Models: Evolution and Architectures</a:t>
+              <a:t>Introduction to NLP: Challenges and Opportunities</a:t>
             </a:r>
           </a:p>
         </p:txBody>
@@ -5789,32 +6935,27 @@
           <a:lstStyle/>
           <a:p>
             <a:r>
-              <a:t>Early chatbots, like ELIZA and PARRY, were predominantly rule-based systems, relying on pattern matching and pre-defined scripts.</a:t>
-            </a:r>
-          </a:p>
-          <a:p>
-            <a:r>
-              <a:t>The advent of AI brought forth retrieval-based and generative models, moving beyond rigid rules to more dynamic and conversational interactions.</a:t>
-            </a:r>
-          </a:p>
-          <a:p>
-            <a:r>
-              <a:t>Generative AI models, especially Large Language Models (LLMs), represent a paradigm shift, capable of creating novel and coherent text.</a:t>
-            </a:r>
-          </a:p>
-          <a:p>
-            <a:r>
-              <a:t>Transformer architecture, introduced in 2017, revolutionized LLMs by utilizing self-attention mechanisms to process entire sequences in parallel, overcoming limitations of RNNs.</a:t>
-            </a:r>
-          </a:p>
-          <a:p>
-            <a:r>
-              <a:t>Key components of LLMs include encoder-decoder stacks (for seq2seq tasks) or decoder-only stacks (for generative tasks), multi-head attention, and feed-forward networks.</a:t>
-            </a:r>
-          </a:p>
-          <a:p>
-            <a:r>
-              <a:t>Pre-training on vast corpora of text data (e.g., common crawl, Wikipedia) allows LLMs to learn statistical relationships and linguistic patterns, forming a general understanding of language.</a:t>
+              <a:t>Ambiguity in natural language (lexical, syntactic, semantic) remains a significant challenge, requiring sophisticated contextual understanding.</a:t>
+            </a:r>
+          </a:p>
+          <a:p>
+            <a:r>
+              <a:t>The scarcity of high-quality annotated data for less-resourced languages hinders universal applicability of advanced NLP models.</a:t>
+            </a:r>
+          </a:p>
+          <a:p>
+            <a:r>
+              <a:t>Developing truly generalizable NLP models that perform robustly across diverse domains, genres, and dialects is an ongoing research area.</a:t>
+            </a:r>
+          </a:p>
+          <a:p>
+            <a:r>
+              <a:t>The rise of multimodal NLP, integrating text with images, audio, and video, presents opportunities for richer understanding.</a:t>
+            </a:r>
+          </a:p>
+          <a:p>
+            <a:r>
+              <a:t>Ethical considerations, including bias, fairness, and privacy, are paramount as NLP models become more powerful and pervasive in society.</a:t>
             </a:r>
           </a:p>
         </p:txBody>
@@ -5853,7 +6994,7 @@
           <a:lstStyle/>
           <a:p>
             <a:r>
-              <a:t>Chatbots and Language Models: Pre-training and Fine-tuning</a:t>
+              <a:t>Text Preprocessing: The Foundation of NLP</a:t>
             </a:r>
           </a:p>
         </p:txBody>
@@ -5874,32 +7015,27 @@
           <a:lstStyle/>
           <a:p>
             <a:r>
-              <a:t>Pre-training is an unsupervised learning phase where LLMs are exposed to massive text datasets to learn general language understanding and generation capabilities.</a:t>
-            </a:r>
-          </a:p>
-          <a:p>
-            <a:r>
-              <a:t>Common pre-training objectives include Masked Language Modeling (MLM), where models predict masked words, and Next Sentence Prediction (NSP), for understanding sentence relationships.</a:t>
-            </a:r>
-          </a:p>
-          <a:p>
-            <a:r>
-              <a:t>The scale of pre-training data and model parameters (billions to trillions) enables emergent abilities like complex reasoning, summarization, and code generation.</a:t>
-            </a:r>
-          </a:p>
-          <a:p>
-            <a:r>
-              <a:t>Fine-tuning adapts a pre-trained LLM to specific downstream tasks or domains using smaller, labeled datasets, enhancing performance for particular applications.</a:t>
-            </a:r>
-          </a:p>
-          <a:p>
-            <a:r>
-              <a:t>Techniques like Parameter-Efficient Fine-Tuning (PEFT), such as LoRA, allow for adapting large models with minimal computational cost by updating only a small subset of parameters.</a:t>
-            </a:r>
-          </a:p>
-          <a:p>
-            <a:r>
-              <a:t>Reinforcement Learning from Human Feedback (RLHF) is a critical fine-tuning step, aligning model outputs with human preferences and ethical guidelines, reducing harmful or unhelpful responses.</a:t>
+              <a:t>Text preprocessing is the initial and crucial step in any NLP pipeline, transforming raw text into a clean, normalized, and suitable format for analysis.</a:t>
+            </a:r>
+          </a:p>
+          <a:p>
+            <a:r>
+              <a:t>It aims to reduce noise, inconsistency, and redundancy in textual data, thereby improving the efficiency and accuracy of subsequent NLP tasks.</a:t>
+            </a:r>
+          </a:p>
+          <a:p>
+            <a:r>
+              <a:t>Improper or insufficient preprocessing can lead to suboptimal model performance, increased computational cost, and skewed analytical results.</a:t>
+            </a:r>
+          </a:p>
+          <a:p>
+            <a:r>
+              <a:t>The specific preprocessing steps applied often depend on the nature of the data, the target NLP task, and the language being processed.</a:t>
+            </a:r>
+          </a:p>
+          <a:p>
+            <a:r>
+              <a:t>It ensures that variations in text formatting do not adversely impact the learning capabilities of machine learning or deep learning models.</a:t>
             </a:r>
           </a:p>
         </p:txBody>
@@ -5938,7 +7074,7 @@
           <a:lstStyle/>
           <a:p>
             <a:r>
-              <a:t>Chatbots and Language Models: Capabilities and Applications</a:t>
+              <a:t>Text Preprocessing: Common Steps - Normalization</a:t>
             </a:r>
           </a:p>
         </p:txBody>
@@ -5959,32 +7095,27 @@
           <a:lstStyle/>
           <a:p>
             <a:r>
-              <a:t>LLMs demonstrate remarkable capabilities in natural language understanding (NLU), including sentiment analysis, named entity recognition, and question answering.</a:t>
-            </a:r>
-          </a:p>
-          <a:p>
-            <a:r>
-              <a:t>Their natural language generation (NLG) prowess extends to creative writing, content creation, summarization, translation, and even code generation.</a:t>
-            </a:r>
-          </a:p>
-          <a:p>
-            <a:r>
-              <a:t>Chatbots powered by LLMs provide enhanced customer service, offering more natural, personalized, and context-aware interactions than previous generations.</a:t>
-            </a:r>
-          </a:p>
-          <a:p>
-            <a:r>
-              <a:t>Applications include virtual assistants, educational tools for personalized learning, therapeutic chatbots for mental health support, and tools for data analysis and insight extraction.</a:t>
-            </a:r>
-          </a:p>
-          <a:p>
-            <a:r>
-              <a:t>LLMs are increasingly used for complex problem-solving, acting as intelligent assistants that can brainstorm ideas, debug code, and draft extensive reports.</a:t>
-            </a:r>
-          </a:p>
-          <a:p>
-            <a:r>
-              <a:t>The ability to handle multimodal inputs (text, image, audio) is emerging, enabling more comprehensive and interactive AI agents.</a:t>
+              <a:t>Lowercasing converts all text to lowercase, treating 'Apple' and 'apple' as the same word, which reduces vocabulary size and improves matching.</a:t>
+            </a:r>
+          </a:p>
+          <a:p>
+            <a:r>
+              <a:t>Punctuation removal eliminates characters like periods, commas, and question marks, which are often irrelevant for many analytical tasks but critical for others like sentiment.</a:t>
+            </a:r>
+          </a:p>
+          <a:p>
+            <a:r>
+              <a:t>Handling numbers involves deciding whether to remove them, convert them to a generic token (e.g., `&lt;NUM&gt;`), or keep them based on task relevance.</a:t>
+            </a:r>
+          </a:p>
+          <a:p>
+            <a:r>
+              <a:t>Contraction expansion (e.g., 'don't' to 'do not') standardizes word forms and ensures full semantic representation.</a:t>
+            </a:r>
+          </a:p>
+          <a:p>
+            <a:r>
+              <a:t>Removal of special characters and symbols (e.g., emojis, mathematical symbols) cleans text unless they carry specific semantic meaning for the task.</a:t>
             </a:r>
           </a:p>
         </p:txBody>
@@ -6023,7 +7154,7 @@
           <a:lstStyle/>
           <a:p>
             <a:r>
-              <a:t>Chatbots and Language Models: Limitations and Challenges</a:t>
+              <a:t>Text Preprocessing: Common Steps - Feature Reduction</a:t>
             </a:r>
           </a:p>
         </p:txBody>
@@ -6044,32 +7175,27 @@
           <a:lstStyle/>
           <a:p>
             <a:r>
-              <a:t>Hallucination refers to the generation of factually incorrect or nonsensical information that the model presents as true, a significant challenge for reliability.</a:t>
-            </a:r>
-          </a:p>
-          <a:p>
-            <a:r>
-              <a:t>Bias amplification occurs when LLMs reflect and magnify biases present in their training data, leading to unfair or discriminatory outputs.</a:t>
-            </a:r>
-          </a:p>
-          <a:p>
-            <a:r>
-              <a:t>Lack of true common-sense reasoning and world knowledge limits their ability to understand complex causal relationships or adapt to novel, unexpected situations.</a:t>
-            </a:r>
-          </a:p>
-          <a:p>
-            <a:r>
-              <a:t>Ethical concerns include potential for misuse (e.g., deepfakes, misinformation), intellectual property infringement, and job displacement.</a:t>
-            </a:r>
-          </a:p>
-          <a:p>
-            <a:r>
-              <a:t>Computational cost for training and inference of large models remains extremely high, posing accessibility and environmental challenges.</a:t>
-            </a:r>
-          </a:p>
-          <a:p>
-            <a:r>
-              <a:t>The 'black box' nature of deep learning models makes it difficult to understand their decision-making process, impacting trust and debuggability.</a:t>
+              <a:t>Stop word removal involves eliminating common words (e.g., 'the', 'is', 'a') that typically carry little semantic meaning and can clutter analysis.</a:t>
+            </a:r>
+          </a:p>
+          <a:p>
+            <a:r>
+              <a:t>Stemming reduces words to their root or stem form (e.g., 'running', 'runs', 'ran' to 'run'), often using heuristic rules and potentially resulting in non-dictionary words.</a:t>
+            </a:r>
+          </a:p>
+          <a:p>
+            <a:r>
+              <a:t>Lemmatization is a more sophisticated process that converts words to their base or dictionary form (lemma), considering context and part-of-speech (e.g., 'better' to 'good').</a:t>
+            </a:r>
+          </a:p>
+          <a:p>
+            <a:r>
+              <a:t>These techniques help in reducing the dimensionality of the feature space and focusing on the most informative terms.</a:t>
+            </a:r>
+          </a:p>
+          <a:p>
+            <a:r>
+              <a:t>Care must be taken, as removing stop words or aggressive stemming can sometimes lead to loss of nuanced meaning, particularly in tasks like sentiment analysis.</a:t>
             </a:r>
           </a:p>
         </p:txBody>
